--- a/docs/main-agent-slides.pptx
+++ b/docs/main-agent-slides.pptx
@@ -11,6 +11,7 @@
     <p:sldId id="259" r:id="rId10"/>
     <p:sldId id="260" r:id="rId11"/>
     <p:sldId id="261" r:id="rId12"/>
+    <p:sldId id="262" r:id="rId13"/>
   </p:sldIdLst>
   <p:sldSz cx="12188952" cy="6858000" type="screen4x3"/>
   <p:notesSz cx="6858000" cy="9144000"/>
@@ -3089,7 +3090,7 @@
     <p:bg>
       <p:bgPr>
         <a:solidFill>
-          <a:srgbClr val="1E1E2E"/>
+          <a:srgbClr val="FFFFFF"/>
         </a:solidFill>
         <a:effectLst/>
       </p:bgPr>
@@ -3116,7 +3117,7 @@
             <a:avLst/>
           </a:prstGeom>
           <a:solidFill>
-            <a:srgbClr val="89B4FA"/>
+            <a:srgbClr val="3A59D1"/>
           </a:solidFill>
           <a:ln>
             <a:noFill/>
@@ -3170,7 +3171,7 @@
             <a:r>
               <a:rPr sz="4000" b="1">
                 <a:solidFill>
-                  <a:srgbClr val="FFFFFF"/>
+                  <a:srgbClr val="3A59D1"/>
                 </a:solidFill>
               </a:rPr>
               <a:t>메인 에이전트 (통합 분석)</a:t>
@@ -3204,7 +3205,7 @@
             <a:r>
               <a:rPr sz="1600" b="0">
                 <a:solidFill>
-                  <a:srgbClr val="BAC2DE"/>
+                  <a:srgbClr val="5A6A9E"/>
                 </a:solidFill>
               </a:rPr>
               <a:t>뉴스 · 공시 · 재무 서브에이전트를 병렬 호출하여
@@ -3228,7 +3229,7 @@
             <a:avLst/>
           </a:prstGeom>
           <a:solidFill>
-            <a:srgbClr val="313244"/>
+            <a:srgbClr val="EEF2FF"/>
           </a:solidFill>
           <a:ln>
             <a:noFill/>
@@ -3282,7 +3283,7 @@
             <a:r>
               <a:rPr sz="1300" b="1">
                 <a:solidFill>
-                  <a:srgbClr val="A6E3A1"/>
+                  <a:srgbClr val="1A7A4A"/>
                 </a:solidFill>
               </a:rPr>
               <a:t>gpt-5-mini</a:t>
@@ -3305,7 +3306,7 @@
             <a:avLst/>
           </a:prstGeom>
           <a:solidFill>
-            <a:srgbClr val="313244"/>
+            <a:srgbClr val="EEF2FF"/>
           </a:solidFill>
           <a:ln>
             <a:noFill/>
@@ -3359,7 +3360,7 @@
             <a:r>
               <a:rPr sz="1300" b="1">
                 <a:solidFill>
-                  <a:srgbClr val="89B4FA"/>
+                  <a:srgbClr val="3A59D1"/>
                 </a:solidFill>
               </a:rPr>
               <a:t>LangGraph RAG</a:t>
@@ -3382,7 +3383,7 @@
             <a:avLst/>
           </a:prstGeom>
           <a:solidFill>
-            <a:srgbClr val="313244"/>
+            <a:srgbClr val="EEF2FF"/>
           </a:solidFill>
           <a:ln>
             <a:noFill/>
@@ -3436,7 +3437,7 @@
             <a:r>
               <a:rPr sz="1300" b="1">
                 <a:solidFill>
-                  <a:srgbClr val="F9E2AF"/>
+                  <a:srgbClr val="B86C00"/>
                 </a:solidFill>
               </a:rPr>
               <a:t>PostgreSQL 캐시</a:t>
@@ -3470,7 +3471,7 @@
             <a:r>
               <a:rPr sz="1100" b="0">
                 <a:solidFill>
-                  <a:srgbClr val="BAC2DE"/>
+                  <a:srgbClr val="5A6A9E"/>
                 </a:solidFill>
               </a:rPr>
               <a:t>stock-supporters-backend  |  2026</a:t>
@@ -3492,7 +3493,7 @@
     <p:bg>
       <p:bgPr>
         <a:solidFill>
-          <a:srgbClr val="1E1E2E"/>
+          <a:srgbClr val="FFFFFF"/>
         </a:solidFill>
         <a:effectLst/>
       </p:bgPr>
@@ -3519,7 +3520,7 @@
             <a:avLst/>
           </a:prstGeom>
           <a:solidFill>
-            <a:srgbClr val="18182E"/>
+            <a:srgbClr val="3A59D1"/>
           </a:solidFill>
           <a:ln>
             <a:noFill/>
@@ -3573,7 +3574,7 @@
             <a:r>
               <a:rPr sz="2800" b="1">
                 <a:solidFill>
-                  <a:srgbClr val="89B4FA"/>
+                  <a:srgbClr val="FFFFFF"/>
                 </a:solidFill>
               </a:rPr>
               <a:t>아키텍처 흐름</a:t>
@@ -3607,7 +3608,7 @@
             <a:r>
               <a:rPr sz="1300" b="0">
                 <a:solidFill>
-                  <a:srgbClr val="BAC2DE"/>
+                  <a:srgbClr val="CCDAFF"/>
                 </a:solidFill>
               </a:rPr>
               <a:t>POST /api/v1/agent/query 요청 처리 과정</a:t>
@@ -3630,7 +3631,7 @@
             <a:avLst/>
           </a:prstGeom>
           <a:solidFill>
-            <a:srgbClr val="313244"/>
+            <a:srgbClr val="EEF2FF"/>
           </a:solidFill>
           <a:ln>
             <a:noFill/>
@@ -3673,7 +3674,7 @@
             <a:avLst/>
           </a:prstGeom>
           <a:solidFill>
-            <a:srgbClr val="89B4FA"/>
+            <a:srgbClr val="3A59D1"/>
           </a:solidFill>
           <a:ln>
             <a:noFill/>
@@ -3727,7 +3728,7 @@
             <a:r>
               <a:rPr sz="1500" b="1">
                 <a:solidFill>
-                  <a:srgbClr val="89B4FA"/>
+                  <a:srgbClr val="3A59D1"/>
                 </a:solidFill>
               </a:rPr>
               <a:t>① 인증 확인</a:t>
@@ -3761,7 +3762,7 @@
             <a:r>
               <a:rPr sz="1200" b="0">
                 <a:solidFill>
-                  <a:srgbClr val="BAC2DE"/>
+                  <a:srgbClr val="5A6A9E"/>
                 </a:solidFill>
               </a:rPr>
               <a:t>쿠키 / 쿼리 파라미터 / Authorization 헤더</a:t>
@@ -3784,7 +3785,7 @@
             <a:avLst/>
           </a:prstGeom>
           <a:solidFill>
-            <a:srgbClr val="313244"/>
+            <a:srgbClr val="EEF2FF"/>
           </a:solidFill>
           <a:ln>
             <a:noFill/>
@@ -3827,7 +3828,7 @@
             <a:avLst/>
           </a:prstGeom>
           <a:solidFill>
-            <a:srgbClr val="F9E2AF"/>
+            <a:srgbClr val="B86C00"/>
           </a:solidFill>
           <a:ln>
             <a:noFill/>
@@ -3881,7 +3882,7 @@
             <a:r>
               <a:rPr sz="1500" b="1">
                 <a:solidFill>
-                  <a:srgbClr val="F9E2AF"/>
+                  <a:srgbClr val="B86C00"/>
                 </a:solidFill>
               </a:rPr>
               <a:t>② 캐시 조회</a:t>
@@ -3915,7 +3916,7 @@
             <a:r>
               <a:rPr sz="1200" b="0">
                 <a:solidFill>
-                  <a:srgbClr val="BAC2DE"/>
+                  <a:srgbClr val="5A6A9E"/>
                 </a:solidFill>
               </a:rPr>
               <a:t>PostgreSQL — 동일 ticker 1시간 이내 결과 재사용</a:t>
@@ -3938,7 +3939,7 @@
             <a:avLst/>
           </a:prstGeom>
           <a:solidFill>
-            <a:srgbClr val="313244"/>
+            <a:srgbClr val="EEF2FF"/>
           </a:solidFill>
           <a:ln>
             <a:noFill/>
@@ -3981,7 +3982,7 @@
             <a:avLst/>
           </a:prstGeom>
           <a:solidFill>
-            <a:srgbClr val="A6E3A1"/>
+            <a:srgbClr val="1A7A4A"/>
           </a:solidFill>
           <a:ln>
             <a:noFill/>
@@ -4035,7 +4036,7 @@
             <a:r>
               <a:rPr sz="1500" b="1">
                 <a:solidFill>
-                  <a:srgbClr val="A6E3A1"/>
+                  <a:srgbClr val="1A7A4A"/>
                 </a:solidFill>
               </a:rPr>
               <a:t>③ 병렬 호출</a:t>
@@ -4069,7 +4070,7 @@
             <a:r>
               <a:rPr sz="1200" b="0">
                 <a:solidFill>
-                  <a:srgbClr val="BAC2DE"/>
+                  <a:srgbClr val="5A6A9E"/>
                 </a:solidFill>
               </a:rPr>
               <a:t>asyncio.gather() → 뉴스 · 공시 · 재무 동시 실행</a:t>
@@ -4092,7 +4093,7 @@
             <a:avLst/>
           </a:prstGeom>
           <a:solidFill>
-            <a:srgbClr val="313244"/>
+            <a:srgbClr val="EEF2FF"/>
           </a:solidFill>
           <a:ln>
             <a:noFill/>
@@ -4135,7 +4136,7 @@
             <a:avLst/>
           </a:prstGeom>
           <a:solidFill>
-            <a:srgbClr val="89B4FA"/>
+            <a:srgbClr val="3A59D1"/>
           </a:solidFill>
           <a:ln>
             <a:noFill/>
@@ -4189,7 +4190,7 @@
             <a:r>
               <a:rPr sz="1500" b="1">
                 <a:solidFill>
-                  <a:srgbClr val="89B4FA"/>
+                  <a:srgbClr val="3A59D1"/>
                 </a:solidFill>
               </a:rPr>
               <a:t>④ 시그널 집계</a:t>
@@ -4223,7 +4224,7 @@
             <a:r>
               <a:rPr sz="1200" b="0">
                 <a:solidFill>
-                  <a:srgbClr val="BAC2DE"/>
+                  <a:srgbClr val="5A6A9E"/>
                 </a:solidFill>
               </a:rPr>
               <a:t>가중 평균: Σ(signal × confidence) / Σ(confidence)</a:t>
@@ -4246,7 +4247,7 @@
             <a:avLst/>
           </a:prstGeom>
           <a:solidFill>
-            <a:srgbClr val="313244"/>
+            <a:srgbClr val="EEF2FF"/>
           </a:solidFill>
           <a:ln>
             <a:noFill/>
@@ -4289,7 +4290,7 @@
             <a:avLst/>
           </a:prstGeom>
           <a:solidFill>
-            <a:srgbClr val="F9E2AF"/>
+            <a:srgbClr val="B86C00"/>
           </a:solidFill>
           <a:ln>
             <a:noFill/>
@@ -4343,7 +4344,7 @@
             <a:r>
               <a:rPr sz="1500" b="1">
                 <a:solidFill>
-                  <a:srgbClr val="F9E2AF"/>
+                  <a:srgbClr val="B86C00"/>
                 </a:solidFill>
               </a:rPr>
               <a:t>⑤ LLM 종합</a:t>
@@ -4377,7 +4378,7 @@
             <a:r>
               <a:rPr sz="1200" b="0">
                 <a:solidFill>
-                  <a:srgbClr val="BAC2DE"/>
+                  <a:srgbClr val="5A6A9E"/>
                 </a:solidFill>
               </a:rPr>
               <a:t>OpenAISynthesisClient (gpt-5-mini) → summary + key_points</a:t>
@@ -4400,7 +4401,7 @@
             <a:avLst/>
           </a:prstGeom>
           <a:solidFill>
-            <a:srgbClr val="313244"/>
+            <a:srgbClr val="EEF2FF"/>
           </a:solidFill>
           <a:ln>
             <a:noFill/>
@@ -4443,7 +4444,7 @@
             <a:avLst/>
           </a:prstGeom>
           <a:solidFill>
-            <a:srgbClr val="A6E3A1"/>
+            <a:srgbClr val="1A7A4A"/>
           </a:solidFill>
           <a:ln>
             <a:noFill/>
@@ -4497,7 +4498,7 @@
             <a:r>
               <a:rPr sz="1500" b="1">
                 <a:solidFill>
-                  <a:srgbClr val="A6E3A1"/>
+                  <a:srgbClr val="1A7A4A"/>
                 </a:solidFill>
               </a:rPr>
               <a:t>⑥ 저장 및 반환</a:t>
@@ -4531,7 +4532,7 @@
             <a:r>
               <a:rPr sz="1200" b="0">
                 <a:solidFill>
-                  <a:srgbClr val="BAC2DE"/>
+                  <a:srgbClr val="5A6A9E"/>
                 </a:solidFill>
               </a:rPr>
               <a:t>integrated_analysis_results INSERT → FrontendAgentResponse</a:t>
@@ -4553,7 +4554,7 @@
     <p:bg>
       <p:bgPr>
         <a:solidFill>
-          <a:srgbClr val="1E1E2E"/>
+          <a:srgbClr val="FFFFFF"/>
         </a:solidFill>
         <a:effectLst/>
       </p:bgPr>
@@ -4580,7 +4581,7 @@
             <a:avLst/>
           </a:prstGeom>
           <a:solidFill>
-            <a:srgbClr val="18182E"/>
+            <a:srgbClr val="3A59D1"/>
           </a:solidFill>
           <a:ln>
             <a:noFill/>
@@ -4634,7 +4635,7 @@
             <a:r>
               <a:rPr sz="2800" b="1">
                 <a:solidFill>
-                  <a:srgbClr val="89B4FA"/>
+                  <a:srgbClr val="FFFFFF"/>
                 </a:solidFill>
               </a:rPr>
               <a:t>서브에이전트 상세</a:t>
@@ -4668,7 +4669,7 @@
             <a:r>
               <a:rPr sz="1300" b="0">
                 <a:solidFill>
-                  <a:srgbClr val="BAC2DE"/>
+                  <a:srgbClr val="CCDAFF"/>
                 </a:solidFill>
               </a:rPr>
               <a:t>각 에이전트의 데이터 소스 · 기술 · 응답 시간</a:t>
@@ -4691,7 +4692,7 @@
             <a:avLst/>
           </a:prstGeom>
           <a:solidFill>
-            <a:srgbClr val="313244"/>
+            <a:srgbClr val="EEF2FF"/>
           </a:solidFill>
           <a:ln>
             <a:noFill/>
@@ -4734,7 +4735,7 @@
             <a:avLst/>
           </a:prstGeom>
           <a:solidFill>
-            <a:srgbClr val="A6E3A1"/>
+            <a:srgbClr val="1A7A4A"/>
           </a:solidFill>
           <a:ln>
             <a:noFill/>
@@ -4788,7 +4789,7 @@
             <a:r>
               <a:rPr sz="1500" b="1">
                 <a:solidFill>
-                  <a:srgbClr val="1E1E2E"/>
+                  <a:srgbClr val="FFFFFF"/>
                 </a:solidFill>
               </a:rPr>
               <a:t>뉴스 에이전트</a:t>
@@ -4822,7 +4823,7 @@
             <a:r>
               <a:rPr sz="1200" b="0">
                 <a:solidFill>
-                  <a:srgbClr val="FFFFFF"/>
+                  <a:srgbClr val="1A2B55"/>
                 </a:solidFill>
               </a:rPr>
               <a:t>• 네이버 뉴스 API 수집 (8개 종목)
@@ -4848,7 +4849,7 @@
             <a:avLst/>
           </a:prstGeom>
           <a:solidFill>
-            <a:srgbClr val="A6E3A1"/>
+            <a:srgbClr val="1A7A4A"/>
           </a:solidFill>
           <a:ln>
             <a:noFill/>
@@ -4902,7 +4903,7 @@
             <a:r>
               <a:rPr sz="1200" b="0">
                 <a:solidFill>
-                  <a:srgbClr val="A6E3A1"/>
+                  <a:srgbClr val="1A7A4A"/>
                 </a:solidFill>
               </a:rPr>
               <a:t>⏱  8 ~ 12 초</a:t>
@@ -4925,7 +4926,7 @@
             <a:avLst/>
           </a:prstGeom>
           <a:solidFill>
-            <a:srgbClr val="313244"/>
+            <a:srgbClr val="EEF2FF"/>
           </a:solidFill>
           <a:ln>
             <a:noFill/>
@@ -4968,7 +4969,7 @@
             <a:avLst/>
           </a:prstGeom>
           <a:solidFill>
-            <a:srgbClr val="F9E2AF"/>
+            <a:srgbClr val="B86C00"/>
           </a:solidFill>
           <a:ln>
             <a:noFill/>
@@ -5022,7 +5023,7 @@
             <a:r>
               <a:rPr sz="1500" b="1">
                 <a:solidFill>
-                  <a:srgbClr val="1E1E2E"/>
+                  <a:srgbClr val="FFFFFF"/>
                 </a:solidFill>
               </a:rPr>
               <a:t>공시 에이전트</a:t>
@@ -5056,7 +5057,7 @@
             <a:r>
               <a:rPr sz="1200" b="0">
                 <a:solidFill>
-                  <a:srgbClr val="FFFFFF"/>
+                  <a:srgbClr val="1A2B55"/>
                 </a:solidFill>
               </a:rPr>
               <a:t>• DART API → 공시 수집 및 저장
@@ -5082,7 +5083,7 @@
             <a:avLst/>
           </a:prstGeom>
           <a:solidFill>
-            <a:srgbClr val="F9E2AF"/>
+            <a:srgbClr val="B86C00"/>
           </a:solidFill>
           <a:ln>
             <a:noFill/>
@@ -5136,7 +5137,7 @@
             <a:r>
               <a:rPr sz="1200" b="0">
                 <a:solidFill>
-                  <a:srgbClr val="F9E2AF"/>
+                  <a:srgbClr val="B86C00"/>
                 </a:solidFill>
               </a:rPr>
               <a:t>⏱  캐시 ~500ms / RAG 7~20초</a:t>
@@ -5159,7 +5160,7 @@
             <a:avLst/>
           </a:prstGeom>
           <a:solidFill>
-            <a:srgbClr val="313244"/>
+            <a:srgbClr val="EEF2FF"/>
           </a:solidFill>
           <a:ln>
             <a:noFill/>
@@ -5202,7 +5203,7 @@
             <a:avLst/>
           </a:prstGeom>
           <a:solidFill>
-            <a:srgbClr val="89B4FA"/>
+            <a:srgbClr val="3A59D1"/>
           </a:solidFill>
           <a:ln>
             <a:noFill/>
@@ -5256,7 +5257,7 @@
             <a:r>
               <a:rPr sz="1500" b="1">
                 <a:solidFill>
-                  <a:srgbClr val="1E1E2E"/>
+                  <a:srgbClr val="FFFFFF"/>
                 </a:solidFill>
               </a:rPr>
               <a:t>재무 에이전트</a:t>
@@ -5290,7 +5291,7 @@
             <a:r>
               <a:rPr sz="1200" b="0">
                 <a:solidFill>
-                  <a:srgbClr val="FFFFFF"/>
+                  <a:srgbClr val="1A2B55"/>
                 </a:solidFill>
               </a:rPr>
               <a:t>• SerpAPI + DART 재무비율 수집
@@ -5316,7 +5317,7 @@
             <a:avLst/>
           </a:prstGeom>
           <a:solidFill>
-            <a:srgbClr val="89B4FA"/>
+            <a:srgbClr val="3A59D1"/>
           </a:solidFill>
           <a:ln>
             <a:noFill/>
@@ -5370,7 +5371,7 @@
             <a:r>
               <a:rPr sz="1200" b="0">
                 <a:solidFill>
-                  <a:srgbClr val="89B4FA"/>
+                  <a:srgbClr val="3A59D1"/>
                 </a:solidFill>
               </a:rPr>
               <a:t>⏱  캐시 ~1초 / 첫 분석 40~60초</a:t>
@@ -5392,7 +5393,7 @@
     <p:bg>
       <p:bgPr>
         <a:solidFill>
-          <a:srgbClr val="1E1E2E"/>
+          <a:srgbClr val="FFFFFF"/>
         </a:solidFill>
         <a:effectLst/>
       </p:bgPr>
@@ -5419,7 +5420,7 @@
             <a:avLst/>
           </a:prstGeom>
           <a:solidFill>
-            <a:srgbClr val="18182E"/>
+            <a:srgbClr val="3A59D1"/>
           </a:solidFill>
           <a:ln>
             <a:noFill/>
@@ -5473,7 +5474,7 @@
             <a:r>
               <a:rPr sz="2800" b="1">
                 <a:solidFill>
-                  <a:srgbClr val="89B4FA"/>
+                  <a:srgbClr val="FFFFFF"/>
                 </a:solidFill>
               </a:rPr>
               <a:t>엔드포인트 스펙</a:t>
@@ -5496,7 +5497,7 @@
             <a:avLst/>
           </a:prstGeom>
           <a:solidFill>
-            <a:srgbClr val="313244"/>
+            <a:srgbClr val="EEF2FF"/>
           </a:solidFill>
           <a:ln>
             <a:noFill/>
@@ -5550,7 +5551,7 @@
             <a:r>
               <a:rPr sz="1400" b="1">
                 <a:solidFill>
-                  <a:srgbClr val="A6E3A1"/>
+                  <a:srgbClr val="1A7A4A"/>
                 </a:solidFill>
               </a:rPr>
               <a:t>POST  /api/v1/agent/query</a:t>
@@ -5584,7 +5585,7 @@
             <a:r>
               <a:rPr sz="1150" b="0">
                 <a:solidFill>
-                  <a:srgbClr val="BAC2DE"/>
+                  <a:srgbClr val="5A6A9E"/>
                 </a:solidFill>
               </a:rPr>
               <a:t>요청 Body:
@@ -5618,7 +5619,7 @@
             <a:avLst/>
           </a:prstGeom>
           <a:solidFill>
-            <a:srgbClr val="313244"/>
+            <a:srgbClr val="EEF2FF"/>
           </a:solidFill>
           <a:ln>
             <a:noFill/>
@@ -5672,7 +5673,7 @@
             <a:r>
               <a:rPr sz="1400" b="1">
                 <a:solidFill>
-                  <a:srgbClr val="89B4FA"/>
+                  <a:srgbClr val="3A59D1"/>
                 </a:solidFill>
               </a:rPr>
               <a:t>GET  /api/v1/agent/history</a:t>
@@ -5706,7 +5707,7 @@
             <a:r>
               <a:rPr sz="1150" b="0">
                 <a:solidFill>
-                  <a:srgbClr val="BAC2DE"/>
+                  <a:srgbClr val="5A6A9E"/>
                 </a:solidFill>
               </a:rPr>
               <a:t>파라미터:
@@ -5734,7 +5735,7 @@
             <a:avLst/>
           </a:prstGeom>
           <a:solidFill>
-            <a:srgbClr val="313244"/>
+            <a:srgbClr val="EEF2FF"/>
           </a:solidFill>
           <a:ln>
             <a:noFill/>
@@ -5788,7 +5789,7 @@
             <a:r>
               <a:rPr sz="1400" b="1">
                 <a:solidFill>
-                  <a:srgbClr val="F9E2AF"/>
+                  <a:srgbClr val="B86C00"/>
                 </a:solidFill>
               </a:rPr>
               <a:t>인증 방식 (공통)</a:t>
@@ -5822,7 +5823,7 @@
             <a:r>
               <a:rPr sz="1150" b="0">
                 <a:solidFill>
-                  <a:srgbClr val="BAC2DE"/>
+                  <a:srgbClr val="5A6A9E"/>
                 </a:solidFill>
               </a:rPr>
               <a:t>① 쿼리 파라미터:  ?token={uuid}
@@ -5847,7 +5848,7 @@
     <p:bg>
       <p:bgPr>
         <a:solidFill>
-          <a:srgbClr val="1E1E2E"/>
+          <a:srgbClr val="FFFFFF"/>
         </a:solidFill>
         <a:effectLst/>
       </p:bgPr>
@@ -5874,7 +5875,7 @@
             <a:avLst/>
           </a:prstGeom>
           <a:solidFill>
-            <a:srgbClr val="18182E"/>
+            <a:srgbClr val="3A59D1"/>
           </a:solidFill>
           <a:ln>
             <a:noFill/>
@@ -5928,7 +5929,7 @@
             <a:r>
               <a:rPr sz="2800" b="1">
                 <a:solidFill>
-                  <a:srgbClr val="89B4FA"/>
+                  <a:srgbClr val="FFFFFF"/>
                 </a:solidFill>
               </a:rPr>
               <a:t>시그널 집계 &amp; DB 테이블</a:t>
@@ -5951,7 +5952,7 @@
             <a:avLst/>
           </a:prstGeom>
           <a:solidFill>
-            <a:srgbClr val="313244"/>
+            <a:srgbClr val="EEF2FF"/>
           </a:solidFill>
           <a:ln>
             <a:noFill/>
@@ -6005,7 +6006,7 @@
             <a:r>
               <a:rPr sz="1400" b="1">
                 <a:solidFill>
-                  <a:srgbClr val="89B4FA"/>
+                  <a:srgbClr val="3A59D1"/>
                 </a:solidFill>
               </a:rPr>
               <a:t>시그널 가중 집계 로직</a:t>
@@ -6039,7 +6040,7 @@
             <a:r>
               <a:rPr sz="1300" b="1">
                 <a:solidFill>
-                  <a:srgbClr val="FFFFFF"/>
+                  <a:srgbClr val="1A2B55"/>
                 </a:solidFill>
               </a:rPr>
               <a:t>score = Σ(signal_score × confidence)
@@ -6063,7 +6064,7 @@
             <a:avLst/>
           </a:prstGeom>
           <a:solidFill>
-            <a:srgbClr val="24273A"/>
+            <a:srgbClr val="E0E8FF"/>
           </a:solidFill>
           <a:ln>
             <a:noFill/>
@@ -6117,7 +6118,7 @@
             <a:r>
               <a:rPr sz="1300" b="1">
                 <a:solidFill>
-                  <a:srgbClr val="A6E3A1"/>
+                  <a:srgbClr val="1A7A4A"/>
                 </a:solidFill>
               </a:rPr>
               <a:t>+1.0</a:t>
@@ -6151,7 +6152,7 @@
             <a:r>
               <a:rPr sz="1300" b="0">
                 <a:solidFill>
-                  <a:srgbClr val="FFFFFF"/>
+                  <a:srgbClr val="1A2B55"/>
                 </a:solidFill>
               </a:rPr>
               <a:t>bullish  →  매수 신호</a:t>
@@ -6174,7 +6175,7 @@
             <a:avLst/>
           </a:prstGeom>
           <a:solidFill>
-            <a:srgbClr val="24273A"/>
+            <a:srgbClr val="E0E8FF"/>
           </a:solidFill>
           <a:ln>
             <a:noFill/>
@@ -6228,7 +6229,7 @@
             <a:r>
               <a:rPr sz="1300" b="1">
                 <a:solidFill>
-                  <a:srgbClr val="BAC2DE"/>
+                  <a:srgbClr val="5A6A9E"/>
                 </a:solidFill>
               </a:rPr>
               <a:t> 0.0</a:t>
@@ -6262,7 +6263,7 @@
             <a:r>
               <a:rPr sz="1300" b="0">
                 <a:solidFill>
-                  <a:srgbClr val="FFFFFF"/>
+                  <a:srgbClr val="1A2B55"/>
                 </a:solidFill>
               </a:rPr>
               <a:t>neutral  →  관망 신호</a:t>
@@ -6285,7 +6286,7 @@
             <a:avLst/>
           </a:prstGeom>
           <a:solidFill>
-            <a:srgbClr val="24273A"/>
+            <a:srgbClr val="E0E8FF"/>
           </a:solidFill>
           <a:ln>
             <a:noFill/>
@@ -6339,7 +6340,7 @@
             <a:r>
               <a:rPr sz="1300" b="1">
                 <a:solidFill>
-                  <a:srgbClr val="F38BA8"/>
+                  <a:srgbClr val="C0392B"/>
                 </a:solidFill>
               </a:rPr>
               <a:t>-1.0</a:t>
@@ -6373,7 +6374,7 @@
             <a:r>
               <a:rPr sz="1300" b="0">
                 <a:solidFill>
-                  <a:srgbClr val="FFFFFF"/>
+                  <a:srgbClr val="1A2B55"/>
                 </a:solidFill>
               </a:rPr>
               <a:t>bearish  →  매도 신호</a:t>
@@ -6407,7 +6408,7 @@
             <a:r>
               <a:rPr sz="1200" b="0">
                 <a:solidFill>
-                  <a:srgbClr val="BAC2DE"/>
+                  <a:srgbClr val="5A6A9E"/>
                 </a:solidFill>
               </a:rPr>
               <a:t>판정 기준:
@@ -6433,7 +6434,7 @@
             <a:avLst/>
           </a:prstGeom>
           <a:solidFill>
-            <a:srgbClr val="313244"/>
+            <a:srgbClr val="EEF2FF"/>
           </a:solidFill>
           <a:ln>
             <a:noFill/>
@@ -6487,7 +6488,7 @@
             <a:r>
               <a:rPr sz="1400" b="1">
                 <a:solidFill>
-                  <a:srgbClr val="F9E2AF"/>
+                  <a:srgbClr val="3A59D1"/>
                 </a:solidFill>
               </a:rPr>
               <a:t>integrated_analysis_results</a:t>
@@ -6510,7 +6511,7 @@
             <a:avLst/>
           </a:prstGeom>
           <a:solidFill>
-            <a:srgbClr val="313244"/>
+            <a:srgbClr val="EEF2FF"/>
           </a:solidFill>
           <a:ln>
             <a:noFill/>
@@ -6564,7 +6565,7 @@
             <a:r>
               <a:rPr sz="1100" b="1">
                 <a:solidFill>
-                  <a:srgbClr val="89B4FA"/>
+                  <a:srgbClr val="3A59D1"/>
                 </a:solidFill>
               </a:rPr>
               <a:t>ticker</a:t>
@@ -6598,7 +6599,7 @@
             <a:r>
               <a:rPr sz="1000" b="0">
                 <a:solidFill>
-                  <a:srgbClr val="F9E2AF"/>
+                  <a:srgbClr val="B86C00"/>
                 </a:solidFill>
               </a:rPr>
               <a:t>VARCHAR</a:t>
@@ -6632,7 +6633,7 @@
             <a:r>
               <a:rPr sz="1000" b="0">
                 <a:solidFill>
-                  <a:srgbClr val="BAC2DE"/>
+                  <a:srgbClr val="5A6A9E"/>
                 </a:solidFill>
               </a:rPr>
               <a:t>종목 코드 (인덱스)</a:t>
@@ -6655,7 +6656,7 @@
             <a:avLst/>
           </a:prstGeom>
           <a:solidFill>
-            <a:srgbClr val="24273A"/>
+            <a:srgbClr val="E0E8FF"/>
           </a:solidFill>
           <a:ln>
             <a:noFill/>
@@ -6709,7 +6710,7 @@
             <a:r>
               <a:rPr sz="1100" b="1">
                 <a:solidFill>
-                  <a:srgbClr val="89B4FA"/>
+                  <a:srgbClr val="3A59D1"/>
                 </a:solidFill>
               </a:rPr>
               <a:t>overall_signal</a:t>
@@ -6743,7 +6744,7 @@
             <a:r>
               <a:rPr sz="1000" b="0">
                 <a:solidFill>
-                  <a:srgbClr val="F9E2AF"/>
+                  <a:srgbClr val="B86C00"/>
                 </a:solidFill>
               </a:rPr>
               <a:t>VARCHAR</a:t>
@@ -6777,7 +6778,7 @@
             <a:r>
               <a:rPr sz="1000" b="0">
                 <a:solidFill>
-                  <a:srgbClr val="BAC2DE"/>
+                  <a:srgbClr val="5A6A9E"/>
                 </a:solidFill>
               </a:rPr>
               <a:t>bullish / bearish / neutral</a:t>
@@ -6800,7 +6801,7 @@
             <a:avLst/>
           </a:prstGeom>
           <a:solidFill>
-            <a:srgbClr val="313244"/>
+            <a:srgbClr val="EEF2FF"/>
           </a:solidFill>
           <a:ln>
             <a:noFill/>
@@ -6854,7 +6855,7 @@
             <a:r>
               <a:rPr sz="1100" b="1">
                 <a:solidFill>
-                  <a:srgbClr val="89B4FA"/>
+                  <a:srgbClr val="3A59D1"/>
                 </a:solidFill>
               </a:rPr>
               <a:t>confidence</a:t>
@@ -6888,7 +6889,7 @@
             <a:r>
               <a:rPr sz="1000" b="0">
                 <a:solidFill>
-                  <a:srgbClr val="F9E2AF"/>
+                  <a:srgbClr val="B86C00"/>
                 </a:solidFill>
               </a:rPr>
               <a:t>FLOAT</a:t>
@@ -6922,7 +6923,7 @@
             <a:r>
               <a:rPr sz="1000" b="0">
                 <a:solidFill>
-                  <a:srgbClr val="BAC2DE"/>
+                  <a:srgbClr val="5A6A9E"/>
                 </a:solidFill>
               </a:rPr>
               <a:t>0.0 ~ 1.0</a:t>
@@ -6945,7 +6946,7 @@
             <a:avLst/>
           </a:prstGeom>
           <a:solidFill>
-            <a:srgbClr val="24273A"/>
+            <a:srgbClr val="E0E8FF"/>
           </a:solidFill>
           <a:ln>
             <a:noFill/>
@@ -6999,7 +7000,7 @@
             <a:r>
               <a:rPr sz="1100" b="1">
                 <a:solidFill>
-                  <a:srgbClr val="89B4FA"/>
+                  <a:srgbClr val="3A59D1"/>
                 </a:solidFill>
               </a:rPr>
               <a:t>summary</a:t>
@@ -7033,7 +7034,7 @@
             <a:r>
               <a:rPr sz="1000" b="0">
                 <a:solidFill>
-                  <a:srgbClr val="F9E2AF"/>
+                  <a:srgbClr val="B86C00"/>
                 </a:solidFill>
               </a:rPr>
               <a:t>TEXT</a:t>
@@ -7067,7 +7068,7 @@
             <a:r>
               <a:rPr sz="1000" b="0">
                 <a:solidFill>
-                  <a:srgbClr val="BAC2DE"/>
+                  <a:srgbClr val="5A6A9E"/>
                 </a:solidFill>
               </a:rPr>
               <a:t>LLM 종합 요약</a:t>
@@ -7090,7 +7091,7 @@
             <a:avLst/>
           </a:prstGeom>
           <a:solidFill>
-            <a:srgbClr val="313244"/>
+            <a:srgbClr val="EEF2FF"/>
           </a:solidFill>
           <a:ln>
             <a:noFill/>
@@ -7144,7 +7145,7 @@
             <a:r>
               <a:rPr sz="1100" b="1">
                 <a:solidFill>
-                  <a:srgbClr val="89B4FA"/>
+                  <a:srgbClr val="3A59D1"/>
                 </a:solidFill>
               </a:rPr>
               <a:t>key_points</a:t>
@@ -7178,7 +7179,7 @@
             <a:r>
               <a:rPr sz="1000" b="0">
                 <a:solidFill>
-                  <a:srgbClr val="F9E2AF"/>
+                  <a:srgbClr val="B86C00"/>
                 </a:solidFill>
               </a:rPr>
               <a:t>JSON</a:t>
@@ -7212,7 +7213,7 @@
             <a:r>
               <a:rPr sz="1000" b="0">
                 <a:solidFill>
-                  <a:srgbClr val="BAC2DE"/>
+                  <a:srgbClr val="5A6A9E"/>
                 </a:solidFill>
               </a:rPr>
               <a:t>핵심 포인트 리스트</a:t>
@@ -7235,7 +7236,7 @@
             <a:avLst/>
           </a:prstGeom>
           <a:solidFill>
-            <a:srgbClr val="24273A"/>
+            <a:srgbClr val="E0E8FF"/>
           </a:solidFill>
           <a:ln>
             <a:noFill/>
@@ -7289,7 +7290,7 @@
             <a:r>
               <a:rPr sz="1100" b="1">
                 <a:solidFill>
-                  <a:srgbClr val="89B4FA"/>
+                  <a:srgbClr val="3A59D1"/>
                 </a:solidFill>
               </a:rPr>
               <a:t>sub_results</a:t>
@@ -7323,7 +7324,7 @@
             <a:r>
               <a:rPr sz="1000" b="0">
                 <a:solidFill>
-                  <a:srgbClr val="F9E2AF"/>
+                  <a:srgbClr val="B86C00"/>
                 </a:solidFill>
               </a:rPr>
               <a:t>JSON</a:t>
@@ -7357,7 +7358,7 @@
             <a:r>
               <a:rPr sz="1000" b="0">
                 <a:solidFill>
-                  <a:srgbClr val="BAC2DE"/>
+                  <a:srgbClr val="5A6A9E"/>
                 </a:solidFill>
               </a:rPr>
               <a:t>서브에이전트 결과 전체</a:t>
@@ -7380,7 +7381,7 @@
             <a:avLst/>
           </a:prstGeom>
           <a:solidFill>
-            <a:srgbClr val="313244"/>
+            <a:srgbClr val="EEF2FF"/>
           </a:solidFill>
           <a:ln>
             <a:noFill/>
@@ -7434,7 +7435,7 @@
             <a:r>
               <a:rPr sz="1100" b="1">
                 <a:solidFill>
-                  <a:srgbClr val="89B4FA"/>
+                  <a:srgbClr val="3A59D1"/>
                 </a:solidFill>
               </a:rPr>
               <a:t>created_at</a:t>
@@ -7468,7 +7469,7 @@
             <a:r>
               <a:rPr sz="1000" b="0">
                 <a:solidFill>
-                  <a:srgbClr val="F9E2AF"/>
+                  <a:srgbClr val="B86C00"/>
                 </a:solidFill>
               </a:rPr>
               <a:t>DATETIME</a:t>
@@ -7502,7 +7503,7 @@
             <a:r>
               <a:rPr sz="1000" b="0">
                 <a:solidFill>
-                  <a:srgbClr val="BAC2DE"/>
+                  <a:srgbClr val="5A6A9E"/>
                 </a:solidFill>
               </a:rPr>
               <a:t>생성 시각 (캐시 기준)</a:t>
@@ -7536,7 +7537,7 @@
             <a:r>
               <a:rPr sz="1100" b="0">
                 <a:solidFill>
-                  <a:srgbClr val="BAC2DE"/>
+                  <a:srgbClr val="5A6A9E"/>
                 </a:solidFill>
               </a:rPr>
               <a:t>※ 캐시: created_at 기준 1시간 이내 재사용</a:t>
@@ -7558,7 +7559,7 @@
     <p:bg>
       <p:bgPr>
         <a:solidFill>
-          <a:srgbClr val="1E1E2E"/>
+          <a:srgbClr val="FFFFFF"/>
         </a:solidFill>
         <a:effectLst/>
       </p:bgPr>
@@ -7585,7 +7586,7 @@
             <a:avLst/>
           </a:prstGeom>
           <a:solidFill>
-            <a:srgbClr val="18182E"/>
+            <a:srgbClr val="3A59D1"/>
           </a:solidFill>
           <a:ln>
             <a:noFill/>
@@ -7639,10 +7640,10 @@
             <a:r>
               <a:rPr sz="2800" b="1">
                 <a:solidFill>
-                  <a:srgbClr val="89B4FA"/>
-                </a:solidFill>
-              </a:rPr>
-              <a:t>분석 가능 종목 (8개)</a:t>
+                  <a:srgbClr val="FFFFFF"/>
+                </a:solidFill>
+              </a:rPr>
+              <a:t>에러 처리 방식</a:t>
             </a:r>
           </a:p>
         </p:txBody>
@@ -7673,10 +7674,10 @@
             <a:r>
               <a:rPr sz="1300" b="0">
                 <a:solidFill>
-                  <a:srgbClr val="BAC2DE"/>
-                </a:solidFill>
-              </a:rPr>
-              <a:t>뉴스 에이전트 지원 종목 — 공시·재무 에이전트는 모든 종목 지원</a:t>
+                  <a:srgbClr val="CCDAFF"/>
+                </a:solidFill>
+              </a:rPr>
+              <a:t>서브에이전트 실패 격리 · result_status 판정 · 집계 제외 규칙</a:t>
             </a:r>
           </a:p>
         </p:txBody>
@@ -7689,14 +7690,14 @@
         </p:nvSpPr>
         <p:spPr>
           <a:xfrm>
-            <a:off x="274320" y="1188720"/>
-            <a:ext cx="2788920" cy="2331720"/>
+            <a:off x="320040" y="1188720"/>
+            <a:ext cx="5394960" cy="5212080"/>
           </a:xfrm>
           <a:prstGeom prst="rect">
             <a:avLst/>
           </a:prstGeom>
           <a:solidFill>
-            <a:srgbClr val="313244"/>
+            <a:srgbClr val="EEF2FF"/>
           </a:solidFill>
           <a:ln>
             <a:noFill/>
@@ -7732,14 +7733,14 @@
         </p:nvSpPr>
         <p:spPr>
           <a:xfrm>
-            <a:off x="274320" y="1188720"/>
-            <a:ext cx="2788920" cy="384048"/>
+            <a:off x="320040" y="1188720"/>
+            <a:ext cx="5394960" cy="384048"/>
           </a:xfrm>
           <a:prstGeom prst="rect">
             <a:avLst/>
           </a:prstGeom>
           <a:solidFill>
-            <a:srgbClr val="A6E3A1"/>
+            <a:srgbClr val="C0392B"/>
           </a:solidFill>
           <a:ln>
             <a:noFill/>
@@ -7775,8 +7776,8 @@
         </p:nvSpPr>
         <p:spPr>
           <a:xfrm>
-            <a:off x="274320" y="1188720"/>
-            <a:ext cx="2788920" cy="384048"/>
+            <a:off x="320040" y="1188720"/>
+            <a:ext cx="5394960" cy="384048"/>
           </a:xfrm>
           <a:prstGeom prst="rect">
             <a:avLst/>
@@ -7791,12 +7792,12 @@
           <a:p>
             <a:pPr algn="ctr"/>
             <a:r>
-              <a:rPr sz="1400" b="1">
-                <a:solidFill>
-                  <a:srgbClr val="1E1E2E"/>
-                </a:solidFill>
-              </a:rPr>
-              <a:t>삼성전자</a:t>
+              <a:rPr sz="1300" b="1">
+                <a:solidFill>
+                  <a:srgbClr val="FFFFFF"/>
+                </a:solidFill>
+              </a:rPr>
+              <a:t>서브에이전트 실패 격리</a:t>
             </a:r>
           </a:p>
         </p:txBody>
@@ -7809,8 +7810,8 @@
         </p:nvSpPr>
         <p:spPr>
           <a:xfrm>
-            <a:off x="365760" y="1664208"/>
-            <a:ext cx="2606040" cy="320040"/>
+            <a:off x="457200" y="1719072"/>
+            <a:ext cx="5120640" cy="347472"/>
           </a:xfrm>
           <a:prstGeom prst="rect">
             <a:avLst/>
@@ -7825,12 +7826,12 @@
           <a:p>
             <a:pPr algn="l"/>
             <a:r>
-              <a:rPr sz="1200" b="1">
-                <a:solidFill>
-                  <a:srgbClr val="A6E3A1"/>
-                </a:solidFill>
-              </a:rPr>
-              <a:t>005930</a:t>
+              <a:rPr sz="1100" b="1">
+                <a:solidFill>
+                  <a:srgbClr val="3A59D1"/>
+                </a:solidFill>
+              </a:rPr>
+              <a:t>asyncio.gather(return_exceptions=True)</a:t>
             </a:r>
           </a:p>
         </p:txBody>
@@ -7843,8 +7844,8 @@
         </p:nvSpPr>
         <p:spPr>
           <a:xfrm>
-            <a:off x="365760" y="1993392"/>
-            <a:ext cx="2606040" cy="320040"/>
+            <a:off x="457200" y="2029968"/>
+            <a:ext cx="5120640" cy="274320"/>
           </a:xfrm>
           <a:prstGeom prst="rect">
             <a:avLst/>
@@ -7859,66 +7860,32 @@
           <a:p>
             <a:pPr algn="l"/>
             <a:r>
-              <a:rPr sz="1100" b="0">
-                <a:solidFill>
-                  <a:srgbClr val="BAC2DE"/>
-                </a:solidFill>
-              </a:rPr>
-              <a:t>반도체 · 전자</a:t>
-            </a:r>
-          </a:p>
-        </p:txBody>
-      </p:sp>
-      <p:sp>
-        <p:nvSpPr>
-          <p:cNvPr id="10" name="TextBox 9"/>
-          <p:cNvSpPr txBox="1"/>
-          <p:nvPr/>
-        </p:nvSpPr>
-        <p:spPr>
-          <a:xfrm>
-            <a:off x="365760" y="2423160"/>
-            <a:ext cx="2606040" cy="868680"/>
-          </a:xfrm>
-          <a:prstGeom prst="rect">
-            <a:avLst/>
-          </a:prstGeom>
-          <a:noFill/>
-        </p:spPr>
-        <p:txBody>
-          <a:bodyPr wrap="square">
-            <a:spAutoFit/>
-          </a:bodyPr>
-          <a:lstStyle/>
-          <a:p>
-            <a:pPr algn="l"/>
-            <a:r>
               <a:rPr sz="1000" b="0">
                 <a:solidFill>
-                  <a:srgbClr val="FFFFFF"/>
-                </a:solidFill>
-              </a:rPr>
-              <a:t>"삼성전자 투자해도 될까요?"</a:t>
-            </a:r>
-          </a:p>
-        </p:txBody>
-      </p:sp>
-      <p:sp>
-        <p:nvSpPr>
-          <p:cNvPr id="11" name="Rectangle 10"/>
+                  <a:srgbClr val="5A6A9E"/>
+                </a:solidFill>
+              </a:rPr>
+              <a:t>하나가 실패해도 나머지 에이전트는 계속 실행</a:t>
+            </a:r>
+          </a:p>
+        </p:txBody>
+      </p:sp>
+      <p:sp>
+        <p:nvSpPr>
+          <p:cNvPr id="10" name="Rectangle 9"/>
           <p:cNvSpPr/>
           <p:nvPr/>
         </p:nvSpPr>
         <p:spPr>
           <a:xfrm>
-            <a:off x="3246120" y="1188720"/>
-            <a:ext cx="2788920" cy="2331720"/>
+            <a:off x="411480" y="2450592"/>
+            <a:ext cx="5212080" cy="868680"/>
           </a:xfrm>
           <a:prstGeom prst="rect">
             <a:avLst/>
           </a:prstGeom>
           <a:solidFill>
-            <a:srgbClr val="313244"/>
+            <a:srgbClr val="EEF2FF"/>
           </a:solidFill>
           <a:ln>
             <a:noFill/>
@@ -7948,20 +7915,20 @@
       </p:sp>
       <p:sp>
         <p:nvSpPr>
-          <p:cNvPr id="12" name="Rectangle 11"/>
+          <p:cNvPr id="11" name="Rectangle 10"/>
           <p:cNvSpPr/>
           <p:nvPr/>
         </p:nvSpPr>
         <p:spPr>
           <a:xfrm>
-            <a:off x="3246120" y="1188720"/>
-            <a:ext cx="2788920" cy="384048"/>
+            <a:off x="411480" y="2450592"/>
+            <a:ext cx="54864" cy="868680"/>
           </a:xfrm>
           <a:prstGeom prst="rect">
             <a:avLst/>
           </a:prstGeom>
           <a:solidFill>
-            <a:srgbClr val="89B4FA"/>
+            <a:srgbClr val="1A7A4A"/>
           </a:solidFill>
           <a:ln>
             <a:noFill/>
@@ -7991,48 +7958,48 @@
       </p:sp>
       <p:sp>
         <p:nvSpPr>
+          <p:cNvPr id="12" name="TextBox 11"/>
+          <p:cNvSpPr txBox="1"/>
+          <p:nvPr/>
+        </p:nvSpPr>
+        <p:spPr>
+          <a:xfrm>
+            <a:off x="548640" y="2505456"/>
+            <a:ext cx="1645920" cy="320040"/>
+          </a:xfrm>
+          <a:prstGeom prst="rect">
+            <a:avLst/>
+          </a:prstGeom>
+          <a:noFill/>
+        </p:spPr>
+        <p:txBody>
+          <a:bodyPr wrap="square">
+            <a:spAutoFit/>
+          </a:bodyPr>
+          <a:lstStyle/>
+          <a:p>
+            <a:pPr algn="l"/>
+            <a:r>
+              <a:rPr sz="1100" b="1">
+                <a:solidFill>
+                  <a:srgbClr val="1A7A4A"/>
+                </a:solidFill>
+              </a:rPr>
+              <a:t>뉴스 에이전트</a:t>
+            </a:r>
+          </a:p>
+        </p:txBody>
+      </p:sp>
+      <p:sp>
+        <p:nvSpPr>
           <p:cNvPr id="13" name="TextBox 12"/>
           <p:cNvSpPr txBox="1"/>
           <p:nvPr/>
         </p:nvSpPr>
         <p:spPr>
           <a:xfrm>
-            <a:off x="3246120" y="1188720"/>
-            <a:ext cx="2788920" cy="384048"/>
-          </a:xfrm>
-          <a:prstGeom prst="rect">
-            <a:avLst/>
-          </a:prstGeom>
-          <a:noFill/>
-        </p:spPr>
-        <p:txBody>
-          <a:bodyPr wrap="square">
-            <a:spAutoFit/>
-          </a:bodyPr>
-          <a:lstStyle/>
-          <a:p>
-            <a:pPr algn="ctr"/>
-            <a:r>
-              <a:rPr sz="1400" b="1">
-                <a:solidFill>
-                  <a:srgbClr val="1E1E2E"/>
-                </a:solidFill>
-              </a:rPr>
-              <a:t>SK하이닉스</a:t>
-            </a:r>
-          </a:p>
-        </p:txBody>
-      </p:sp>
-      <p:sp>
-        <p:nvSpPr>
-          <p:cNvPr id="14" name="TextBox 13"/>
-          <p:cNvSpPr txBox="1"/>
-          <p:nvPr/>
-        </p:nvSpPr>
-        <p:spPr>
-          <a:xfrm>
-            <a:off x="3337560" y="1664208"/>
-            <a:ext cx="2606040" cy="320040"/>
+            <a:off x="548640" y="2852928"/>
+            <a:ext cx="4937760" cy="402336"/>
           </a:xfrm>
           <a:prstGeom prst="rect">
             <a:avLst/>
@@ -8047,100 +8014,33 @@
           <a:p>
             <a:pPr algn="l"/>
             <a:r>
-              <a:rPr sz="1200" b="1">
-                <a:solidFill>
-                  <a:srgbClr val="89B4FA"/>
-                </a:solidFill>
-              </a:rPr>
-              <a:t>000660</a:t>
-            </a:r>
-          </a:p>
-        </p:txBody>
-      </p:sp>
-      <p:sp>
-        <p:nvSpPr>
-          <p:cNvPr id="15" name="TextBox 14"/>
-          <p:cNvSpPr txBox="1"/>
-          <p:nvPr/>
-        </p:nvSpPr>
-        <p:spPr>
-          <a:xfrm>
-            <a:off x="3337560" y="1993392"/>
-            <a:ext cx="2606040" cy="320040"/>
-          </a:xfrm>
-          <a:prstGeom prst="rect">
-            <a:avLst/>
-          </a:prstGeom>
-          <a:noFill/>
-        </p:spPr>
-        <p:txBody>
-          <a:bodyPr wrap="square">
-            <a:spAutoFit/>
-          </a:bodyPr>
-          <a:lstStyle/>
-          <a:p>
-            <a:pPr algn="l"/>
-            <a:r>
-              <a:rPr sz="1100" b="0">
-                <a:solidFill>
-                  <a:srgbClr val="BAC2DE"/>
-                </a:solidFill>
-              </a:rPr>
-              <a:t>HBM · 메모리</a:t>
-            </a:r>
-          </a:p>
-        </p:txBody>
-      </p:sp>
-      <p:sp>
-        <p:nvSpPr>
-          <p:cNvPr id="16" name="TextBox 15"/>
-          <p:cNvSpPr txBox="1"/>
-          <p:nvPr/>
-        </p:nvSpPr>
-        <p:spPr>
-          <a:xfrm>
-            <a:off x="3337560" y="2423160"/>
-            <a:ext cx="2606040" cy="868680"/>
-          </a:xfrm>
-          <a:prstGeom prst="rect">
-            <a:avLst/>
-          </a:prstGeom>
-          <a:noFill/>
-        </p:spPr>
-        <p:txBody>
-          <a:bodyPr wrap="square">
-            <a:spAutoFit/>
-          </a:bodyPr>
-          <a:lstStyle/>
-          <a:p>
-            <a:pPr algn="l"/>
-            <a:r>
               <a:rPr sz="1000" b="0">
                 <a:solidFill>
-                  <a:srgbClr val="FFFFFF"/>
-                </a:solidFill>
-              </a:rPr>
-              <a:t>"HBM 실적 기대되는데 투자해도 될까?"</a:t>
-            </a:r>
-          </a:p>
-        </p:txBody>
-      </p:sp>
-      <p:sp>
-        <p:nvSpPr>
-          <p:cNvPr id="17" name="Rectangle 16"/>
+                  <a:srgbClr val="5A6A9E"/>
+                </a:solidFill>
+              </a:rPr>
+              <a:t>DB 없음 → 자동 수집 후 재시도
+재시도 후에도 없으면 no_data 반환</a:t>
+            </a:r>
+          </a:p>
+        </p:txBody>
+      </p:sp>
+      <p:sp>
+        <p:nvSpPr>
+          <p:cNvPr id="14" name="Rectangle 13"/>
           <p:cNvSpPr/>
           <p:nvPr/>
         </p:nvSpPr>
         <p:spPr>
           <a:xfrm>
-            <a:off x="6217920" y="1188720"/>
-            <a:ext cx="2788920" cy="2331720"/>
+            <a:off x="411480" y="3438144"/>
+            <a:ext cx="5212080" cy="868680"/>
           </a:xfrm>
           <a:prstGeom prst="rect">
             <a:avLst/>
           </a:prstGeom>
           <a:solidFill>
-            <a:srgbClr val="313244"/>
+            <a:srgbClr val="E0E8FF"/>
           </a:solidFill>
           <a:ln>
             <a:noFill/>
@@ -8170,20 +8070,20 @@
       </p:sp>
       <p:sp>
         <p:nvSpPr>
-          <p:cNvPr id="18" name="Rectangle 17"/>
+          <p:cNvPr id="15" name="Rectangle 14"/>
           <p:cNvSpPr/>
           <p:nvPr/>
         </p:nvSpPr>
         <p:spPr>
           <a:xfrm>
-            <a:off x="6217920" y="1188720"/>
-            <a:ext cx="2788920" cy="384048"/>
+            <a:off x="411480" y="3438144"/>
+            <a:ext cx="54864" cy="868680"/>
           </a:xfrm>
           <a:prstGeom prst="rect">
             <a:avLst/>
           </a:prstGeom>
           <a:solidFill>
-            <a:srgbClr val="F9E2AF"/>
+            <a:srgbClr val="B86C00"/>
           </a:solidFill>
           <a:ln>
             <a:noFill/>
@@ -8213,48 +8113,14 @@
       </p:sp>
       <p:sp>
         <p:nvSpPr>
-          <p:cNvPr id="19" name="TextBox 18"/>
-          <p:cNvSpPr txBox="1"/>
-          <p:nvPr/>
-        </p:nvSpPr>
-        <p:spPr>
-          <a:xfrm>
-            <a:off x="6217920" y="1188720"/>
-            <a:ext cx="2788920" cy="384048"/>
-          </a:xfrm>
-          <a:prstGeom prst="rect">
-            <a:avLst/>
-          </a:prstGeom>
-          <a:noFill/>
-        </p:spPr>
-        <p:txBody>
-          <a:bodyPr wrap="square">
-            <a:spAutoFit/>
-          </a:bodyPr>
-          <a:lstStyle/>
-          <a:p>
-            <a:pPr algn="ctr"/>
-            <a:r>
-              <a:rPr sz="1400" b="1">
-                <a:solidFill>
-                  <a:srgbClr val="1E1E2E"/>
-                </a:solidFill>
-              </a:rPr>
-              <a:t>현대차</a:t>
-            </a:r>
-          </a:p>
-        </p:txBody>
-      </p:sp>
-      <p:sp>
-        <p:nvSpPr>
-          <p:cNvPr id="20" name="TextBox 19"/>
-          <p:cNvSpPr txBox="1"/>
-          <p:nvPr/>
-        </p:nvSpPr>
-        <p:spPr>
-          <a:xfrm>
-            <a:off x="6309359" y="1664208"/>
-            <a:ext cx="2606040" cy="320040"/>
+          <p:cNvPr id="16" name="TextBox 15"/>
+          <p:cNvSpPr txBox="1"/>
+          <p:nvPr/>
+        </p:nvSpPr>
+        <p:spPr>
+          <a:xfrm>
+            <a:off x="548640" y="3493008"/>
+            <a:ext cx="1645920" cy="320040"/>
           </a:xfrm>
           <a:prstGeom prst="rect">
             <a:avLst/>
@@ -8269,26 +8135,26 @@
           <a:p>
             <a:pPr algn="l"/>
             <a:r>
-              <a:rPr sz="1200" b="1">
-                <a:solidFill>
-                  <a:srgbClr val="F9E2AF"/>
-                </a:solidFill>
-              </a:rPr>
-              <a:t>005380</a:t>
-            </a:r>
-          </a:p>
-        </p:txBody>
-      </p:sp>
-      <p:sp>
-        <p:nvSpPr>
-          <p:cNvPr id="21" name="TextBox 20"/>
-          <p:cNvSpPr txBox="1"/>
-          <p:nvPr/>
-        </p:nvSpPr>
-        <p:spPr>
-          <a:xfrm>
-            <a:off x="6309359" y="1993392"/>
-            <a:ext cx="2606040" cy="320040"/>
+              <a:rPr sz="1100" b="1">
+                <a:solidFill>
+                  <a:srgbClr val="B86C00"/>
+                </a:solidFill>
+              </a:rPr>
+              <a:t>공시 에이전트</a:t>
+            </a:r>
+          </a:p>
+        </p:txBody>
+      </p:sp>
+      <p:sp>
+        <p:nvSpPr>
+          <p:cNvPr id="17" name="TextBox 16"/>
+          <p:cNvSpPr txBox="1"/>
+          <p:nvPr/>
+        </p:nvSpPr>
+        <p:spPr>
+          <a:xfrm>
+            <a:off x="548640" y="3840480"/>
+            <a:ext cx="4937760" cy="402336"/>
           </a:xfrm>
           <a:prstGeom prst="rect">
             <a:avLst/>
@@ -8303,66 +8169,33 @@
           <a:p>
             <a:pPr algn="l"/>
             <a:r>
-              <a:rPr sz="1100" b="0">
-                <a:solidFill>
-                  <a:srgbClr val="BAC2DE"/>
-                </a:solidFill>
-              </a:rPr>
-              <a:t>전기차 · 모빌리티</a:t>
-            </a:r>
-          </a:p>
-        </p:txBody>
-      </p:sp>
-      <p:sp>
-        <p:nvSpPr>
-          <p:cNvPr id="22" name="TextBox 21"/>
-          <p:cNvSpPr txBox="1"/>
-          <p:nvPr/>
-        </p:nvSpPr>
-        <p:spPr>
-          <a:xfrm>
-            <a:off x="6309359" y="2423160"/>
-            <a:ext cx="2606040" cy="868680"/>
-          </a:xfrm>
-          <a:prstGeom prst="rect">
-            <a:avLst/>
-          </a:prstGeom>
-          <a:noFill/>
-        </p:spPr>
-        <p:txBody>
-          <a:bodyPr wrap="square">
-            <a:spAutoFit/>
-          </a:bodyPr>
-          <a:lstStyle/>
-          <a:p>
-            <a:pPr algn="l"/>
-            <a:r>
               <a:rPr sz="1000" b="0">
                 <a:solidFill>
-                  <a:srgbClr val="FFFFFF"/>
-                </a:solidFill>
-              </a:rPr>
-              <a:t>"전기차 전환 어떻게 보고 있어?"</a:t>
-            </a:r>
-          </a:p>
-        </p:txBody>
-      </p:sp>
-      <p:sp>
-        <p:nvSpPr>
-          <p:cNvPr id="23" name="Rectangle 22"/>
+                  <a:srgbClr val="5A6A9E"/>
+                </a:solidFill>
+              </a:rPr>
+              <a:t>예외 발생 시 error 반환
+Redis 캐시 히트 시 즉시 반환</a:t>
+            </a:r>
+          </a:p>
+        </p:txBody>
+      </p:sp>
+      <p:sp>
+        <p:nvSpPr>
+          <p:cNvPr id="18" name="Rectangle 17"/>
           <p:cNvSpPr/>
           <p:nvPr/>
         </p:nvSpPr>
         <p:spPr>
           <a:xfrm>
-            <a:off x="9189720" y="1188720"/>
-            <a:ext cx="2788920" cy="2331720"/>
+            <a:off x="411480" y="4425696"/>
+            <a:ext cx="5212080" cy="868680"/>
           </a:xfrm>
           <a:prstGeom prst="rect">
             <a:avLst/>
           </a:prstGeom>
           <a:solidFill>
-            <a:srgbClr val="313244"/>
+            <a:srgbClr val="EEF2FF"/>
           </a:solidFill>
           <a:ln>
             <a:noFill/>
@@ -8392,20 +8225,20 @@
       </p:sp>
       <p:sp>
         <p:nvSpPr>
-          <p:cNvPr id="24" name="Rectangle 23"/>
+          <p:cNvPr id="19" name="Rectangle 18"/>
           <p:cNvSpPr/>
           <p:nvPr/>
         </p:nvSpPr>
         <p:spPr>
           <a:xfrm>
-            <a:off x="9189720" y="1188720"/>
-            <a:ext cx="2788920" cy="384048"/>
+            <a:off x="411480" y="4425696"/>
+            <a:ext cx="54864" cy="868680"/>
           </a:xfrm>
           <a:prstGeom prst="rect">
             <a:avLst/>
           </a:prstGeom>
           <a:solidFill>
-            <a:srgbClr val="A6E3A1"/>
+            <a:srgbClr val="3A59D1"/>
           </a:solidFill>
           <a:ln>
             <a:noFill/>
@@ -8435,48 +8268,14 @@
       </p:sp>
       <p:sp>
         <p:nvSpPr>
-          <p:cNvPr id="25" name="TextBox 24"/>
-          <p:cNvSpPr txBox="1"/>
-          <p:nvPr/>
-        </p:nvSpPr>
-        <p:spPr>
-          <a:xfrm>
-            <a:off x="9189720" y="1188720"/>
-            <a:ext cx="2788920" cy="384048"/>
-          </a:xfrm>
-          <a:prstGeom prst="rect">
-            <a:avLst/>
-          </a:prstGeom>
-          <a:noFill/>
-        </p:spPr>
-        <p:txBody>
-          <a:bodyPr wrap="square">
-            <a:spAutoFit/>
-          </a:bodyPr>
-          <a:lstStyle/>
-          <a:p>
-            <a:pPr algn="ctr"/>
-            <a:r>
-              <a:rPr sz="1400" b="1">
-                <a:solidFill>
-                  <a:srgbClr val="1E1E2E"/>
-                </a:solidFill>
-              </a:rPr>
-              <a:t>네이버</a:t>
-            </a:r>
-          </a:p>
-        </p:txBody>
-      </p:sp>
-      <p:sp>
-        <p:nvSpPr>
-          <p:cNvPr id="26" name="TextBox 25"/>
-          <p:cNvSpPr txBox="1"/>
-          <p:nvPr/>
-        </p:nvSpPr>
-        <p:spPr>
-          <a:xfrm>
-            <a:off x="9281160" y="1664208"/>
-            <a:ext cx="2606040" cy="320040"/>
+          <p:cNvPr id="20" name="TextBox 19"/>
+          <p:cNvSpPr txBox="1"/>
+          <p:nvPr/>
+        </p:nvSpPr>
+        <p:spPr>
+          <a:xfrm>
+            <a:off x="548640" y="4480559"/>
+            <a:ext cx="1645920" cy="320040"/>
           </a:xfrm>
           <a:prstGeom prst="rect">
             <a:avLst/>
@@ -8491,26 +8290,26 @@
           <a:p>
             <a:pPr algn="l"/>
             <a:r>
-              <a:rPr sz="1200" b="1">
-                <a:solidFill>
-                  <a:srgbClr val="A6E3A1"/>
-                </a:solidFill>
-              </a:rPr>
-              <a:t>035420</a:t>
-            </a:r>
-          </a:p>
-        </p:txBody>
-      </p:sp>
-      <p:sp>
-        <p:nvSpPr>
-          <p:cNvPr id="27" name="TextBox 26"/>
-          <p:cNvSpPr txBox="1"/>
-          <p:nvPr/>
-        </p:nvSpPr>
-        <p:spPr>
-          <a:xfrm>
-            <a:off x="9281160" y="1993392"/>
-            <a:ext cx="2606040" cy="320040"/>
+              <a:rPr sz="1100" b="1">
+                <a:solidFill>
+                  <a:srgbClr val="3A59D1"/>
+                </a:solidFill>
+              </a:rPr>
+              <a:t>재무 에이전트</a:t>
+            </a:r>
+          </a:p>
+        </p:txBody>
+      </p:sp>
+      <p:sp>
+        <p:nvSpPr>
+          <p:cNvPr id="21" name="TextBox 20"/>
+          <p:cNvSpPr txBox="1"/>
+          <p:nvPr/>
+        </p:nvSpPr>
+        <p:spPr>
+          <a:xfrm>
+            <a:off x="548640" y="4828032"/>
+            <a:ext cx="4937760" cy="402336"/>
           </a:xfrm>
           <a:prstGeom prst="rect">
             <a:avLst/>
@@ -8525,26 +8324,27 @@
           <a:p>
             <a:pPr algn="l"/>
             <a:r>
-              <a:rPr sz="1100" b="0">
-                <a:solidFill>
-                  <a:srgbClr val="BAC2DE"/>
-                </a:solidFill>
-              </a:rPr>
-              <a:t>AI · 플랫폼</a:t>
-            </a:r>
-          </a:p>
-        </p:txBody>
-      </p:sp>
-      <p:sp>
-        <p:nvSpPr>
-          <p:cNvPr id="28" name="TextBox 27"/>
-          <p:cNvSpPr txBox="1"/>
-          <p:nvPr/>
-        </p:nvSpPr>
-        <p:spPr>
-          <a:xfrm>
-            <a:off x="9281160" y="2423160"/>
-            <a:ext cx="2606040" cy="868680"/>
+              <a:rPr sz="1000" b="0">
+                <a:solidFill>
+                  <a:srgbClr val="5A6A9E"/>
+                </a:solidFill>
+              </a:rPr>
+              <a:t>벡터 DB 없음 → 자동 수집 후 재시도
+수집 실패 시 error 반환</a:t>
+            </a:r>
+          </a:p>
+        </p:txBody>
+      </p:sp>
+      <p:sp>
+        <p:nvSpPr>
+          <p:cNvPr id="22" name="TextBox 21"/>
+          <p:cNvSpPr txBox="1"/>
+          <p:nvPr/>
+        </p:nvSpPr>
+        <p:spPr>
+          <a:xfrm>
+            <a:off x="457200" y="5468112"/>
+            <a:ext cx="5120640" cy="347472"/>
           </a:xfrm>
           <a:prstGeom prst="rect">
             <a:avLst/>
@@ -8561,30 +8361,30 @@
             <a:r>
               <a:rPr sz="1000" b="0">
                 <a:solidFill>
-                  <a:srgbClr val="FFFFFF"/>
-                </a:solidFill>
-              </a:rPr>
-              <a:t>"AI 사업 성장 가능성 어때?"</a:t>
-            </a:r>
-          </a:p>
-        </p:txBody>
-      </p:sp>
-      <p:sp>
-        <p:nvSpPr>
-          <p:cNvPr id="29" name="Rectangle 28"/>
+                  <a:srgbClr val="5A6A9E"/>
+                </a:solidFill>
+              </a:rPr>
+              <a:t>실패 에이전트 → _coerce() → SubAgentResponse.error()</a:t>
+            </a:r>
+          </a:p>
+        </p:txBody>
+      </p:sp>
+      <p:sp>
+        <p:nvSpPr>
+          <p:cNvPr id="23" name="Rectangle 22"/>
           <p:cNvSpPr/>
           <p:nvPr/>
         </p:nvSpPr>
         <p:spPr>
           <a:xfrm>
-            <a:off x="274320" y="3840480"/>
-            <a:ext cx="2788920" cy="2331720"/>
+            <a:off x="6035040" y="1188720"/>
+            <a:ext cx="5833872" cy="2468880"/>
           </a:xfrm>
           <a:prstGeom prst="rect">
             <a:avLst/>
           </a:prstGeom>
           <a:solidFill>
-            <a:srgbClr val="313244"/>
+            <a:srgbClr val="EEF2FF"/>
           </a:solidFill>
           <a:ln>
             <a:noFill/>
@@ -8614,20 +8414,20 @@
       </p:sp>
       <p:sp>
         <p:nvSpPr>
-          <p:cNvPr id="30" name="Rectangle 29"/>
+          <p:cNvPr id="24" name="Rectangle 23"/>
           <p:cNvSpPr/>
           <p:nvPr/>
         </p:nvSpPr>
         <p:spPr>
           <a:xfrm>
-            <a:off x="274320" y="3840480"/>
-            <a:ext cx="2788920" cy="384048"/>
+            <a:off x="6035040" y="1188720"/>
+            <a:ext cx="5833872" cy="384048"/>
           </a:xfrm>
           <a:prstGeom prst="rect">
             <a:avLst/>
           </a:prstGeom>
           <a:solidFill>
-            <a:srgbClr val="89B4FA"/>
+            <a:srgbClr val="3A59D1"/>
           </a:solidFill>
           <a:ln>
             <a:noFill/>
@@ -8657,14 +8457,14 @@
       </p:sp>
       <p:sp>
         <p:nvSpPr>
-          <p:cNvPr id="31" name="TextBox 30"/>
-          <p:cNvSpPr txBox="1"/>
-          <p:nvPr/>
-        </p:nvSpPr>
-        <p:spPr>
-          <a:xfrm>
-            <a:off x="274320" y="3840480"/>
-            <a:ext cx="2788920" cy="384048"/>
+          <p:cNvPr id="25" name="TextBox 24"/>
+          <p:cNvSpPr txBox="1"/>
+          <p:nvPr/>
+        </p:nvSpPr>
+        <p:spPr>
+          <a:xfrm>
+            <a:off x="6035040" y="1188720"/>
+            <a:ext cx="5833872" cy="384048"/>
           </a:xfrm>
           <a:prstGeom prst="rect">
             <a:avLst/>
@@ -8679,134 +8479,32 @@
           <a:p>
             <a:pPr algn="ctr"/>
             <a:r>
-              <a:rPr sz="1400" b="1">
-                <a:solidFill>
-                  <a:srgbClr val="1E1E2E"/>
-                </a:solidFill>
-              </a:rPr>
-              <a:t>카카오</a:t>
-            </a:r>
-          </a:p>
-        </p:txBody>
-      </p:sp>
-      <p:sp>
-        <p:nvSpPr>
-          <p:cNvPr id="32" name="TextBox 31"/>
-          <p:cNvSpPr txBox="1"/>
-          <p:nvPr/>
-        </p:nvSpPr>
-        <p:spPr>
-          <a:xfrm>
-            <a:off x="365760" y="4315968"/>
-            <a:ext cx="2606040" cy="320040"/>
-          </a:xfrm>
-          <a:prstGeom prst="rect">
-            <a:avLst/>
-          </a:prstGeom>
-          <a:noFill/>
-        </p:spPr>
-        <p:txBody>
-          <a:bodyPr wrap="square">
-            <a:spAutoFit/>
-          </a:bodyPr>
-          <a:lstStyle/>
-          <a:p>
-            <a:pPr algn="l"/>
-            <a:r>
-              <a:rPr sz="1200" b="1">
-                <a:solidFill>
-                  <a:srgbClr val="89B4FA"/>
-                </a:solidFill>
-              </a:rPr>
-              <a:t>035720</a:t>
-            </a:r>
-          </a:p>
-        </p:txBody>
-      </p:sp>
-      <p:sp>
-        <p:nvSpPr>
-          <p:cNvPr id="33" name="TextBox 32"/>
-          <p:cNvSpPr txBox="1"/>
-          <p:nvPr/>
-        </p:nvSpPr>
-        <p:spPr>
-          <a:xfrm>
-            <a:off x="365760" y="4645152"/>
-            <a:ext cx="2606040" cy="320040"/>
-          </a:xfrm>
-          <a:prstGeom prst="rect">
-            <a:avLst/>
-          </a:prstGeom>
-          <a:noFill/>
-        </p:spPr>
-        <p:txBody>
-          <a:bodyPr wrap="square">
-            <a:spAutoFit/>
-          </a:bodyPr>
-          <a:lstStyle/>
-          <a:p>
-            <a:pPr algn="l"/>
-            <a:r>
-              <a:rPr sz="1100" b="0">
-                <a:solidFill>
-                  <a:srgbClr val="BAC2DE"/>
-                </a:solidFill>
-              </a:rPr>
-              <a:t>플랫폼 · 콘텐츠</a:t>
-            </a:r>
-          </a:p>
-        </p:txBody>
-      </p:sp>
-      <p:sp>
-        <p:nvSpPr>
-          <p:cNvPr id="34" name="TextBox 33"/>
-          <p:cNvSpPr txBox="1"/>
-          <p:nvPr/>
-        </p:nvSpPr>
-        <p:spPr>
-          <a:xfrm>
-            <a:off x="365760" y="5074920"/>
-            <a:ext cx="2606040" cy="868680"/>
-          </a:xfrm>
-          <a:prstGeom prst="rect">
-            <a:avLst/>
-          </a:prstGeom>
-          <a:noFill/>
-        </p:spPr>
-        <p:txBody>
-          <a:bodyPr wrap="square">
-            <a:spAutoFit/>
-          </a:bodyPr>
-          <a:lstStyle/>
-          <a:p>
-            <a:pPr algn="l"/>
-            <a:r>
-              <a:rPr sz="1000" b="0">
+              <a:rPr sz="1300" b="1">
                 <a:solidFill>
                   <a:srgbClr val="FFFFFF"/>
                 </a:solidFill>
               </a:rPr>
-              <a:t>"지금 저점 매수 타이밍일까?"</a:t>
-            </a:r>
-          </a:p>
-        </p:txBody>
-      </p:sp>
-      <p:sp>
-        <p:nvSpPr>
-          <p:cNvPr id="35" name="Rectangle 34"/>
+              <a:t>result_status 판정</a:t>
+            </a:r>
+          </a:p>
+        </p:txBody>
+      </p:sp>
+      <p:sp>
+        <p:nvSpPr>
+          <p:cNvPr id="26" name="Rectangle 25"/>
           <p:cNvSpPr/>
           <p:nvPr/>
         </p:nvSpPr>
         <p:spPr>
           <a:xfrm>
-            <a:off x="3246120" y="3840480"/>
-            <a:ext cx="2788920" cy="2331720"/>
+            <a:off x="6126480" y="1719072"/>
+            <a:ext cx="5623560" cy="502920"/>
           </a:xfrm>
           <a:prstGeom prst="rect">
             <a:avLst/>
           </a:prstGeom>
           <a:solidFill>
-            <a:srgbClr val="313244"/>
+            <a:srgbClr val="EEF2FF"/>
           </a:solidFill>
           <a:ln>
             <a:noFill/>
@@ -8836,20 +8534,88 @@
       </p:sp>
       <p:sp>
         <p:nvSpPr>
-          <p:cNvPr id="36" name="Rectangle 35"/>
+          <p:cNvPr id="27" name="TextBox 26"/>
+          <p:cNvSpPr txBox="1"/>
+          <p:nvPr/>
+        </p:nvSpPr>
+        <p:spPr>
+          <a:xfrm>
+            <a:off x="6217920" y="1810512"/>
+            <a:ext cx="2560320" cy="320040"/>
+          </a:xfrm>
+          <a:prstGeom prst="rect">
+            <a:avLst/>
+          </a:prstGeom>
+          <a:noFill/>
+        </p:spPr>
+        <p:txBody>
+          <a:bodyPr wrap="square">
+            <a:spAutoFit/>
+          </a:bodyPr>
+          <a:lstStyle/>
+          <a:p>
+            <a:pPr algn="l"/>
+            <a:r>
+              <a:rPr sz="1100" b="0">
+                <a:solidFill>
+                  <a:srgbClr val="1A2B55"/>
+                </a:solidFill>
+              </a:rPr>
+              <a:t>3개 모두 성공</a:t>
+            </a:r>
+          </a:p>
+        </p:txBody>
+      </p:sp>
+      <p:sp>
+        <p:nvSpPr>
+          <p:cNvPr id="28" name="TextBox 27"/>
+          <p:cNvSpPr txBox="1"/>
+          <p:nvPr/>
+        </p:nvSpPr>
+        <p:spPr>
+          <a:xfrm>
+            <a:off x="8823960" y="1810512"/>
+            <a:ext cx="2651760" cy="320040"/>
+          </a:xfrm>
+          <a:prstGeom prst="rect">
+            <a:avLst/>
+          </a:prstGeom>
+          <a:noFill/>
+        </p:spPr>
+        <p:txBody>
+          <a:bodyPr wrap="square">
+            <a:spAutoFit/>
+          </a:bodyPr>
+          <a:lstStyle/>
+          <a:p>
+            <a:pPr algn="l"/>
+            <a:r>
+              <a:rPr sz="1100" b="1">
+                <a:solidFill>
+                  <a:srgbClr val="1A7A4A"/>
+                </a:solidFill>
+              </a:rPr>
+              <a:t>success</a:t>
+            </a:r>
+          </a:p>
+        </p:txBody>
+      </p:sp>
+      <p:sp>
+        <p:nvSpPr>
+          <p:cNvPr id="29" name="Rectangle 28"/>
           <p:cNvSpPr/>
           <p:nvPr/>
         </p:nvSpPr>
         <p:spPr>
           <a:xfrm>
-            <a:off x="3246120" y="3840480"/>
-            <a:ext cx="2788920" cy="384048"/>
+            <a:off x="6126480" y="2286000"/>
+            <a:ext cx="5623560" cy="502920"/>
           </a:xfrm>
           <a:prstGeom prst="rect">
             <a:avLst/>
           </a:prstGeom>
           <a:solidFill>
-            <a:srgbClr val="F9E2AF"/>
+            <a:srgbClr val="E0E8FF"/>
           </a:solidFill>
           <a:ln>
             <a:noFill/>
@@ -8879,48 +8645,14 @@
       </p:sp>
       <p:sp>
         <p:nvSpPr>
-          <p:cNvPr id="37" name="TextBox 36"/>
-          <p:cNvSpPr txBox="1"/>
-          <p:nvPr/>
-        </p:nvSpPr>
-        <p:spPr>
-          <a:xfrm>
-            <a:off x="3246120" y="3840480"/>
-            <a:ext cx="2788920" cy="384048"/>
-          </a:xfrm>
-          <a:prstGeom prst="rect">
-            <a:avLst/>
-          </a:prstGeom>
-          <a:noFill/>
-        </p:spPr>
-        <p:txBody>
-          <a:bodyPr wrap="square">
-            <a:spAutoFit/>
-          </a:bodyPr>
-          <a:lstStyle/>
-          <a:p>
-            <a:pPr algn="ctr"/>
-            <a:r>
-              <a:rPr sz="1400" b="1">
-                <a:solidFill>
-                  <a:srgbClr val="1E1E2E"/>
-                </a:solidFill>
-              </a:rPr>
-              <a:t>셀트리온</a:t>
-            </a:r>
-          </a:p>
-        </p:txBody>
-      </p:sp>
-      <p:sp>
-        <p:nvSpPr>
-          <p:cNvPr id="38" name="TextBox 37"/>
-          <p:cNvSpPr txBox="1"/>
-          <p:nvPr/>
-        </p:nvSpPr>
-        <p:spPr>
-          <a:xfrm>
-            <a:off x="3337560" y="4315968"/>
-            <a:ext cx="2606040" cy="320040"/>
+          <p:cNvPr id="30" name="TextBox 29"/>
+          <p:cNvSpPr txBox="1"/>
+          <p:nvPr/>
+        </p:nvSpPr>
+        <p:spPr>
+          <a:xfrm>
+            <a:off x="6217920" y="2377440"/>
+            <a:ext cx="2560320" cy="320040"/>
           </a:xfrm>
           <a:prstGeom prst="rect">
             <a:avLst/>
@@ -8935,26 +8667,26 @@
           <a:p>
             <a:pPr algn="l"/>
             <a:r>
-              <a:rPr sz="1200" b="1">
-                <a:solidFill>
-                  <a:srgbClr val="F9E2AF"/>
-                </a:solidFill>
-              </a:rPr>
-              <a:t>068270</a:t>
-            </a:r>
-          </a:p>
-        </p:txBody>
-      </p:sp>
-      <p:sp>
-        <p:nvSpPr>
-          <p:cNvPr id="39" name="TextBox 38"/>
-          <p:cNvSpPr txBox="1"/>
-          <p:nvPr/>
-        </p:nvSpPr>
-        <p:spPr>
-          <a:xfrm>
-            <a:off x="3337560" y="4645152"/>
-            <a:ext cx="2606040" cy="320040"/>
+              <a:rPr sz="1100" b="0">
+                <a:solidFill>
+                  <a:srgbClr val="1A2B55"/>
+                </a:solidFill>
+              </a:rPr>
+              <a:t>1~2개 성공</a:t>
+            </a:r>
+          </a:p>
+        </p:txBody>
+      </p:sp>
+      <p:sp>
+        <p:nvSpPr>
+          <p:cNvPr id="31" name="TextBox 30"/>
+          <p:cNvSpPr txBox="1"/>
+          <p:nvPr/>
+        </p:nvSpPr>
+        <p:spPr>
+          <a:xfrm>
+            <a:off x="8823960" y="2377440"/>
+            <a:ext cx="2651760" cy="320040"/>
           </a:xfrm>
           <a:prstGeom prst="rect">
             <a:avLst/>
@@ -8969,66 +8701,32 @@
           <a:p>
             <a:pPr algn="l"/>
             <a:r>
-              <a:rPr sz="1100" b="0">
-                <a:solidFill>
-                  <a:srgbClr val="BAC2DE"/>
-                </a:solidFill>
-              </a:rPr>
-              <a:t>바이오시밀러</a:t>
-            </a:r>
-          </a:p>
-        </p:txBody>
-      </p:sp>
-      <p:sp>
-        <p:nvSpPr>
-          <p:cNvPr id="40" name="TextBox 39"/>
-          <p:cNvSpPr txBox="1"/>
-          <p:nvPr/>
-        </p:nvSpPr>
-        <p:spPr>
-          <a:xfrm>
-            <a:off x="3337560" y="5074920"/>
-            <a:ext cx="2606040" cy="868680"/>
-          </a:xfrm>
-          <a:prstGeom prst="rect">
-            <a:avLst/>
-          </a:prstGeom>
-          <a:noFill/>
-        </p:spPr>
-        <p:txBody>
-          <a:bodyPr wrap="square">
-            <a:spAutoFit/>
-          </a:bodyPr>
-          <a:lstStyle/>
-          <a:p>
-            <a:pPr algn="l"/>
-            <a:r>
-              <a:rPr sz="1000" b="0">
-                <a:solidFill>
-                  <a:srgbClr val="FFFFFF"/>
-                </a:solidFill>
-              </a:rPr>
-              <a:t>"바이오시밀러 전망은?"</a:t>
-            </a:r>
-          </a:p>
-        </p:txBody>
-      </p:sp>
-      <p:sp>
-        <p:nvSpPr>
-          <p:cNvPr id="41" name="Rectangle 40"/>
+              <a:rPr sz="1100" b="1">
+                <a:solidFill>
+                  <a:srgbClr val="B86C00"/>
+                </a:solidFill>
+              </a:rPr>
+              <a:t>partial_failure</a:t>
+            </a:r>
+          </a:p>
+        </p:txBody>
+      </p:sp>
+      <p:sp>
+        <p:nvSpPr>
+          <p:cNvPr id="32" name="Rectangle 31"/>
           <p:cNvSpPr/>
           <p:nvPr/>
         </p:nvSpPr>
         <p:spPr>
           <a:xfrm>
-            <a:off x="6217920" y="3840480"/>
-            <a:ext cx="2788920" cy="2331720"/>
+            <a:off x="6126480" y="2852928"/>
+            <a:ext cx="5623560" cy="502920"/>
           </a:xfrm>
           <a:prstGeom prst="rect">
             <a:avLst/>
           </a:prstGeom>
           <a:solidFill>
-            <a:srgbClr val="313244"/>
+            <a:srgbClr val="EEF2FF"/>
           </a:solidFill>
           <a:ln>
             <a:noFill/>
@@ -9058,20 +8756,88 @@
       </p:sp>
       <p:sp>
         <p:nvSpPr>
-          <p:cNvPr id="42" name="Rectangle 41"/>
+          <p:cNvPr id="33" name="TextBox 32"/>
+          <p:cNvSpPr txBox="1"/>
+          <p:nvPr/>
+        </p:nvSpPr>
+        <p:spPr>
+          <a:xfrm>
+            <a:off x="6217920" y="2944368"/>
+            <a:ext cx="2560320" cy="320040"/>
+          </a:xfrm>
+          <a:prstGeom prst="rect">
+            <a:avLst/>
+          </a:prstGeom>
+          <a:noFill/>
+        </p:spPr>
+        <p:txBody>
+          <a:bodyPr wrap="square">
+            <a:spAutoFit/>
+          </a:bodyPr>
+          <a:lstStyle/>
+          <a:p>
+            <a:pPr algn="l"/>
+            <a:r>
+              <a:rPr sz="1100" b="0">
+                <a:solidFill>
+                  <a:srgbClr val="1A2B55"/>
+                </a:solidFill>
+              </a:rPr>
+              <a:t>전체 실패</a:t>
+            </a:r>
+          </a:p>
+        </p:txBody>
+      </p:sp>
+      <p:sp>
+        <p:nvSpPr>
+          <p:cNvPr id="34" name="TextBox 33"/>
+          <p:cNvSpPr txBox="1"/>
+          <p:nvPr/>
+        </p:nvSpPr>
+        <p:spPr>
+          <a:xfrm>
+            <a:off x="8823960" y="2944368"/>
+            <a:ext cx="2651760" cy="320040"/>
+          </a:xfrm>
+          <a:prstGeom prst="rect">
+            <a:avLst/>
+          </a:prstGeom>
+          <a:noFill/>
+        </p:spPr>
+        <p:txBody>
+          <a:bodyPr wrap="square">
+            <a:spAutoFit/>
+          </a:bodyPr>
+          <a:lstStyle/>
+          <a:p>
+            <a:pPr algn="l"/>
+            <a:r>
+              <a:rPr sz="1100" b="1">
+                <a:solidFill>
+                  <a:srgbClr val="C0392B"/>
+                </a:solidFill>
+              </a:rPr>
+              <a:t>failure</a:t>
+            </a:r>
+          </a:p>
+        </p:txBody>
+      </p:sp>
+      <p:sp>
+        <p:nvSpPr>
+          <p:cNvPr id="35" name="Rectangle 34"/>
           <p:cNvSpPr/>
           <p:nvPr/>
         </p:nvSpPr>
         <p:spPr>
           <a:xfrm>
-            <a:off x="6217920" y="3840480"/>
-            <a:ext cx="2788920" cy="384048"/>
+            <a:off x="6035040" y="3822191"/>
+            <a:ext cx="5833872" cy="2578608"/>
           </a:xfrm>
           <a:prstGeom prst="rect">
             <a:avLst/>
           </a:prstGeom>
           <a:solidFill>
-            <a:srgbClr val="A6E3A1"/>
+            <a:srgbClr val="EEF2FF"/>
           </a:solidFill>
           <a:ln>
             <a:noFill/>
@@ -9101,156 +8867,20 @@
       </p:sp>
       <p:sp>
         <p:nvSpPr>
-          <p:cNvPr id="43" name="TextBox 42"/>
-          <p:cNvSpPr txBox="1"/>
-          <p:nvPr/>
-        </p:nvSpPr>
-        <p:spPr>
-          <a:xfrm>
-            <a:off x="6217920" y="3840480"/>
-            <a:ext cx="2788920" cy="384048"/>
-          </a:xfrm>
-          <a:prstGeom prst="rect">
-            <a:avLst/>
-          </a:prstGeom>
-          <a:noFill/>
-        </p:spPr>
-        <p:txBody>
-          <a:bodyPr wrap="square">
-            <a:spAutoFit/>
-          </a:bodyPr>
-          <a:lstStyle/>
-          <a:p>
-            <a:pPr algn="ctr"/>
-            <a:r>
-              <a:rPr sz="1400" b="1">
-                <a:solidFill>
-                  <a:srgbClr val="1E1E2E"/>
-                </a:solidFill>
-              </a:rPr>
-              <a:t>삼성바이오로직스</a:t>
-            </a:r>
-          </a:p>
-        </p:txBody>
-      </p:sp>
-      <p:sp>
-        <p:nvSpPr>
-          <p:cNvPr id="44" name="TextBox 43"/>
-          <p:cNvSpPr txBox="1"/>
-          <p:nvPr/>
-        </p:nvSpPr>
-        <p:spPr>
-          <a:xfrm>
-            <a:off x="6309359" y="4315968"/>
-            <a:ext cx="2606040" cy="320040"/>
-          </a:xfrm>
-          <a:prstGeom prst="rect">
-            <a:avLst/>
-          </a:prstGeom>
-          <a:noFill/>
-        </p:spPr>
-        <p:txBody>
-          <a:bodyPr wrap="square">
-            <a:spAutoFit/>
-          </a:bodyPr>
-          <a:lstStyle/>
-          <a:p>
-            <a:pPr algn="l"/>
-            <a:r>
-              <a:rPr sz="1200" b="1">
-                <a:solidFill>
-                  <a:srgbClr val="A6E3A1"/>
-                </a:solidFill>
-              </a:rPr>
-              <a:t>207940</a:t>
-            </a:r>
-          </a:p>
-        </p:txBody>
-      </p:sp>
-      <p:sp>
-        <p:nvSpPr>
-          <p:cNvPr id="45" name="TextBox 44"/>
-          <p:cNvSpPr txBox="1"/>
-          <p:nvPr/>
-        </p:nvSpPr>
-        <p:spPr>
-          <a:xfrm>
-            <a:off x="6309359" y="4645152"/>
-            <a:ext cx="2606040" cy="320040"/>
-          </a:xfrm>
-          <a:prstGeom prst="rect">
-            <a:avLst/>
-          </a:prstGeom>
-          <a:noFill/>
-        </p:spPr>
-        <p:txBody>
-          <a:bodyPr wrap="square">
-            <a:spAutoFit/>
-          </a:bodyPr>
-          <a:lstStyle/>
-          <a:p>
-            <a:pPr algn="l"/>
-            <a:r>
-              <a:rPr sz="1100" b="0">
-                <a:solidFill>
-                  <a:srgbClr val="BAC2DE"/>
-                </a:solidFill>
-              </a:rPr>
-              <a:t>CMO · 바이오</a:t>
-            </a:r>
-          </a:p>
-        </p:txBody>
-      </p:sp>
-      <p:sp>
-        <p:nvSpPr>
-          <p:cNvPr id="46" name="TextBox 45"/>
-          <p:cNvSpPr txBox="1"/>
-          <p:nvPr/>
-        </p:nvSpPr>
-        <p:spPr>
-          <a:xfrm>
-            <a:off x="6309359" y="5074920"/>
-            <a:ext cx="2606040" cy="868680"/>
-          </a:xfrm>
-          <a:prstGeom prst="rect">
-            <a:avLst/>
-          </a:prstGeom>
-          <a:noFill/>
-        </p:spPr>
-        <p:txBody>
-          <a:bodyPr wrap="square">
-            <a:spAutoFit/>
-          </a:bodyPr>
-          <a:lstStyle/>
-          <a:p>
-            <a:pPr algn="l"/>
-            <a:r>
-              <a:rPr sz="1000" b="0">
-                <a:solidFill>
-                  <a:srgbClr val="FFFFFF"/>
-                </a:solidFill>
-              </a:rPr>
-              <a:t>"장기 투자 괜찮을까?"</a:t>
-            </a:r>
-          </a:p>
-        </p:txBody>
-      </p:sp>
-      <p:sp>
-        <p:nvSpPr>
-          <p:cNvPr id="47" name="Rectangle 46"/>
+          <p:cNvPr id="36" name="Rectangle 35"/>
           <p:cNvSpPr/>
           <p:nvPr/>
         </p:nvSpPr>
         <p:spPr>
           <a:xfrm>
-            <a:off x="9189720" y="3840480"/>
-            <a:ext cx="2788920" cy="2331720"/>
+            <a:off x="6035040" y="3822191"/>
+            <a:ext cx="5833872" cy="384048"/>
           </a:xfrm>
           <a:prstGeom prst="rect">
             <a:avLst/>
           </a:prstGeom>
           <a:solidFill>
-            <a:srgbClr val="313244"/>
+            <a:srgbClr val="B86C00"/>
           </a:solidFill>
           <a:ln>
             <a:noFill/>
@@ -9280,20 +8910,54 @@
       </p:sp>
       <p:sp>
         <p:nvSpPr>
-          <p:cNvPr id="48" name="Rectangle 47"/>
+          <p:cNvPr id="37" name="TextBox 36"/>
+          <p:cNvSpPr txBox="1"/>
+          <p:nvPr/>
+        </p:nvSpPr>
+        <p:spPr>
+          <a:xfrm>
+            <a:off x="6035040" y="3822191"/>
+            <a:ext cx="5833872" cy="384048"/>
+          </a:xfrm>
+          <a:prstGeom prst="rect">
+            <a:avLst/>
+          </a:prstGeom>
+          <a:noFill/>
+        </p:spPr>
+        <p:txBody>
+          <a:bodyPr wrap="square">
+            <a:spAutoFit/>
+          </a:bodyPr>
+          <a:lstStyle/>
+          <a:p>
+            <a:pPr algn="ctr"/>
+            <a:r>
+              <a:rPr sz="1300" b="1">
+                <a:solidFill>
+                  <a:srgbClr val="FFFFFF"/>
+                </a:solidFill>
+              </a:rPr>
+              <a:t>집계 &amp; 저장 규칙</a:t>
+            </a:r>
+          </a:p>
+        </p:txBody>
+      </p:sp>
+      <p:sp>
+        <p:nvSpPr>
+          <p:cNvPr id="38" name="Rectangle 37"/>
           <p:cNvSpPr/>
           <p:nvPr/>
         </p:nvSpPr>
         <p:spPr>
           <a:xfrm>
-            <a:off x="9189720" y="3840480"/>
-            <a:ext cx="2788920" cy="384048"/>
+            <a:off x="6126480" y="4343400"/>
+            <a:ext cx="5623560" cy="594360"/>
           </a:xfrm>
           <a:prstGeom prst="rect">
             <a:avLst/>
           </a:prstGeom>
           <a:solidFill>
-            <a:srgbClr val="89B4FA"/>
+            <a:srgbClr val="EEF2FF"/>
           </a:solidFill>
           <a:ln>
             <a:noFill/>
@@ -9323,8 +8987,2035 @@
       </p:sp>
       <p:sp>
         <p:nvSpPr>
-          <p:cNvPr id="49" name="TextBox 48"/>
-          <p:cNvSpPr txBox="1"/>
+          <p:cNvPr id="39" name="TextBox 38"/>
+          <p:cNvSpPr txBox="1"/>
+          <p:nvPr/>
+        </p:nvSpPr>
+        <p:spPr>
+          <a:xfrm>
+            <a:off x="6217920" y="4379976"/>
+            <a:ext cx="2011680" cy="274320"/>
+          </a:xfrm>
+          <a:prstGeom prst="rect">
+            <a:avLst/>
+          </a:prstGeom>
+          <a:noFill/>
+        </p:spPr>
+        <p:txBody>
+          <a:bodyPr wrap="square">
+            <a:spAutoFit/>
+          </a:bodyPr>
+          <a:lstStyle/>
+          <a:p>
+            <a:pPr algn="l"/>
+            <a:r>
+              <a:rPr sz="1100" b="1">
+                <a:solidFill>
+                  <a:srgbClr val="3A59D1"/>
+                </a:solidFill>
+              </a:rPr>
+              <a:t>시그널 집계 제외</a:t>
+            </a:r>
+          </a:p>
+        </p:txBody>
+      </p:sp>
+      <p:sp>
+        <p:nvSpPr>
+          <p:cNvPr id="40" name="TextBox 39"/>
+          <p:cNvSpPr txBox="1"/>
+          <p:nvPr/>
+        </p:nvSpPr>
+        <p:spPr>
+          <a:xfrm>
+            <a:off x="6217920" y="4636008"/>
+            <a:ext cx="5394960" cy="256032"/>
+          </a:xfrm>
+          <a:prstGeom prst="rect">
+            <a:avLst/>
+          </a:prstGeom>
+          <a:noFill/>
+        </p:spPr>
+        <p:txBody>
+          <a:bodyPr wrap="square">
+            <a:spAutoFit/>
+          </a:bodyPr>
+          <a:lstStyle/>
+          <a:p>
+            <a:pPr algn="l"/>
+            <a:r>
+              <a:rPr sz="900" b="0">
+                <a:solidFill>
+                  <a:srgbClr val="5A6A9E"/>
+                </a:solidFill>
+              </a:rPr>
+              <a:t>is_success() AND signal != None 조건 미충족 시
+실패/no_data 에이전트는 집계에서 제외</a:t>
+            </a:r>
+          </a:p>
+        </p:txBody>
+      </p:sp>
+      <p:sp>
+        <p:nvSpPr>
+          <p:cNvPr id="41" name="Rectangle 40"/>
+          <p:cNvSpPr/>
+          <p:nvPr/>
+        </p:nvSpPr>
+        <p:spPr>
+          <a:xfrm>
+            <a:off x="6126480" y="5001768"/>
+            <a:ext cx="5623560" cy="594360"/>
+          </a:xfrm>
+          <a:prstGeom prst="rect">
+            <a:avLst/>
+          </a:prstGeom>
+          <a:solidFill>
+            <a:srgbClr val="E0E8FF"/>
+          </a:solidFill>
+          <a:ln>
+            <a:noFill/>
+          </a:ln>
+        </p:spPr>
+        <p:style>
+          <a:lnRef idx="1">
+            <a:schemeClr val="accent1"/>
+          </a:lnRef>
+          <a:fillRef idx="3">
+            <a:schemeClr val="accent1"/>
+          </a:fillRef>
+          <a:effectRef idx="2">
+            <a:schemeClr val="accent1"/>
+          </a:effectRef>
+          <a:fontRef idx="minor">
+            <a:schemeClr val="lt1"/>
+          </a:fontRef>
+        </p:style>
+        <p:txBody>
+          <a:bodyPr rtlCol="0" anchor="ctr"/>
+          <a:lstStyle/>
+          <a:p>
+            <a:pPr algn="ctr"/>
+          </a:p>
+        </p:txBody>
+      </p:sp>
+      <p:sp>
+        <p:nvSpPr>
+          <p:cNvPr id="42" name="TextBox 41"/>
+          <p:cNvSpPr txBox="1"/>
+          <p:nvPr/>
+        </p:nvSpPr>
+        <p:spPr>
+          <a:xfrm>
+            <a:off x="6217920" y="5038344"/>
+            <a:ext cx="2011680" cy="274320"/>
+          </a:xfrm>
+          <a:prstGeom prst="rect">
+            <a:avLst/>
+          </a:prstGeom>
+          <a:noFill/>
+        </p:spPr>
+        <p:txBody>
+          <a:bodyPr wrap="square">
+            <a:spAutoFit/>
+          </a:bodyPr>
+          <a:lstStyle/>
+          <a:p>
+            <a:pPr algn="l"/>
+            <a:r>
+              <a:rPr sz="1100" b="1">
+                <a:solidFill>
+                  <a:srgbClr val="3A59D1"/>
+                </a:solidFill>
+              </a:rPr>
+              <a:t>DB 저장 조건</a:t>
+            </a:r>
+          </a:p>
+        </p:txBody>
+      </p:sp>
+      <p:sp>
+        <p:nvSpPr>
+          <p:cNvPr id="43" name="TextBox 42"/>
+          <p:cNvSpPr txBox="1"/>
+          <p:nvPr/>
+        </p:nvSpPr>
+        <p:spPr>
+          <a:xfrm>
+            <a:off x="6217920" y="5294376"/>
+            <a:ext cx="5394960" cy="256032"/>
+          </a:xfrm>
+          <a:prstGeom prst="rect">
+            <a:avLst/>
+          </a:prstGeom>
+          <a:noFill/>
+        </p:spPr>
+        <p:txBody>
+          <a:bodyPr wrap="square">
+            <a:spAutoFit/>
+          </a:bodyPr>
+          <a:lstStyle/>
+          <a:p>
+            <a:pPr algn="l"/>
+            <a:r>
+              <a:rPr sz="900" b="0">
+                <a:solidFill>
+                  <a:srgbClr val="5A6A9E"/>
+                </a:solidFill>
+              </a:rPr>
+              <a:t>result_status == SUCCESS 일 때만 저장
+partial_failure / failure 는 저장 안 함</a:t>
+            </a:r>
+          </a:p>
+        </p:txBody>
+      </p:sp>
+      <p:sp>
+        <p:nvSpPr>
+          <p:cNvPr id="44" name="Rectangle 43"/>
+          <p:cNvSpPr/>
+          <p:nvPr/>
+        </p:nvSpPr>
+        <p:spPr>
+          <a:xfrm>
+            <a:off x="6126480" y="5660136"/>
+            <a:ext cx="5623560" cy="594360"/>
+          </a:xfrm>
+          <a:prstGeom prst="rect">
+            <a:avLst/>
+          </a:prstGeom>
+          <a:solidFill>
+            <a:srgbClr val="EEF2FF"/>
+          </a:solidFill>
+          <a:ln>
+            <a:noFill/>
+          </a:ln>
+        </p:spPr>
+        <p:style>
+          <a:lnRef idx="1">
+            <a:schemeClr val="accent1"/>
+          </a:lnRef>
+          <a:fillRef idx="3">
+            <a:schemeClr val="accent1"/>
+          </a:fillRef>
+          <a:effectRef idx="2">
+            <a:schemeClr val="accent1"/>
+          </a:effectRef>
+          <a:fontRef idx="minor">
+            <a:schemeClr val="lt1"/>
+          </a:fontRef>
+        </p:style>
+        <p:txBody>
+          <a:bodyPr rtlCol="0" anchor="ctr"/>
+          <a:lstStyle/>
+          <a:p>
+            <a:pPr algn="ctr"/>
+          </a:p>
+        </p:txBody>
+      </p:sp>
+      <p:sp>
+        <p:nvSpPr>
+          <p:cNvPr id="45" name="TextBox 44"/>
+          <p:cNvSpPr txBox="1"/>
+          <p:nvPr/>
+        </p:nvSpPr>
+        <p:spPr>
+          <a:xfrm>
+            <a:off x="6217920" y="5696712"/>
+            <a:ext cx="2011680" cy="274320"/>
+          </a:xfrm>
+          <a:prstGeom prst="rect">
+            <a:avLst/>
+          </a:prstGeom>
+          <a:noFill/>
+        </p:spPr>
+        <p:txBody>
+          <a:bodyPr wrap="square">
+            <a:spAutoFit/>
+          </a:bodyPr>
+          <a:lstStyle/>
+          <a:p>
+            <a:pPr algn="l"/>
+            <a:r>
+              <a:rPr sz="1100" b="1">
+                <a:solidFill>
+                  <a:srgbClr val="3A59D1"/>
+                </a:solidFill>
+              </a:rPr>
+              <a:t>캐시 재사용</a:t>
+            </a:r>
+          </a:p>
+        </p:txBody>
+      </p:sp>
+      <p:sp>
+        <p:nvSpPr>
+          <p:cNvPr id="46" name="TextBox 45"/>
+          <p:cNvSpPr txBox="1"/>
+          <p:nvPr/>
+        </p:nvSpPr>
+        <p:spPr>
+          <a:xfrm>
+            <a:off x="6217920" y="5952744"/>
+            <a:ext cx="5394960" cy="256032"/>
+          </a:xfrm>
+          <a:prstGeom prst="rect">
+            <a:avLst/>
+          </a:prstGeom>
+          <a:noFill/>
+        </p:spPr>
+        <p:txBody>
+          <a:bodyPr wrap="square">
+            <a:spAutoFit/>
+          </a:bodyPr>
+          <a:lstStyle/>
+          <a:p>
+            <a:pPr algn="l"/>
+            <a:r>
+              <a:rPr sz="900" b="0">
+                <a:solidFill>
+                  <a:srgbClr val="5A6A9E"/>
+                </a:solidFill>
+              </a:rPr>
+              <a:t>저장된 결과는 1시간 동안 캐시
+동일 ticker 재요청 시 서브에이전트 미호출</a:t>
+            </a:r>
+          </a:p>
+        </p:txBody>
+      </p:sp>
+    </p:spTree>
+  </p:cSld>
+  <p:clrMapOvr>
+    <a:masterClrMapping/>
+  </p:clrMapOvr>
+</p:sld>
+</file>
+
+<file path=ppt/slides/slide7.xml><?xml version="1.0" encoding="utf-8"?>
+<p:sld xmlns:a="http://schemas.openxmlformats.org/drawingml/2006/main" xmlns:p="http://schemas.openxmlformats.org/presentationml/2006/main" xmlns:r="http://schemas.openxmlformats.org/officeDocument/2006/relationships">
+  <p:cSld>
+    <p:bg>
+      <p:bgPr>
+        <a:solidFill>
+          <a:srgbClr val="FFFFFF"/>
+        </a:solidFill>
+        <a:effectLst/>
+      </p:bgPr>
+    </p:bg>
+    <p:spTree>
+      <p:nvGrpSpPr>
+        <p:cNvPr id="1" name=""/>
+        <p:cNvGrpSpPr/>
+        <p:nvPr/>
+      </p:nvGrpSpPr>
+      <p:grpSpPr/>
+      <p:sp>
+        <p:nvSpPr>
+          <p:cNvPr id="2" name="Rectangle 1"/>
+          <p:cNvSpPr/>
+          <p:nvPr/>
+        </p:nvSpPr>
+        <p:spPr>
+          <a:xfrm>
+            <a:off x="0" y="0"/>
+            <a:ext cx="12188952" cy="1005840"/>
+          </a:xfrm>
+          <a:prstGeom prst="rect">
+            <a:avLst/>
+          </a:prstGeom>
+          <a:solidFill>
+            <a:srgbClr val="3A59D1"/>
+          </a:solidFill>
+          <a:ln>
+            <a:noFill/>
+          </a:ln>
+        </p:spPr>
+        <p:style>
+          <a:lnRef idx="1">
+            <a:schemeClr val="accent1"/>
+          </a:lnRef>
+          <a:fillRef idx="3">
+            <a:schemeClr val="accent1"/>
+          </a:fillRef>
+          <a:effectRef idx="2">
+            <a:schemeClr val="accent1"/>
+          </a:effectRef>
+          <a:fontRef idx="minor">
+            <a:schemeClr val="lt1"/>
+          </a:fontRef>
+        </p:style>
+        <p:txBody>
+          <a:bodyPr rtlCol="0" anchor="ctr"/>
+          <a:lstStyle/>
+          <a:p>
+            <a:pPr algn="ctr"/>
+          </a:p>
+        </p:txBody>
+      </p:sp>
+      <p:sp>
+        <p:nvSpPr>
+          <p:cNvPr id="3" name="TextBox 2"/>
+          <p:cNvSpPr txBox="1"/>
+          <p:nvPr/>
+        </p:nvSpPr>
+        <p:spPr>
+          <a:xfrm>
+            <a:off x="365760" y="91440"/>
+            <a:ext cx="9144000" cy="548640"/>
+          </a:xfrm>
+          <a:prstGeom prst="rect">
+            <a:avLst/>
+          </a:prstGeom>
+          <a:noFill/>
+        </p:spPr>
+        <p:txBody>
+          <a:bodyPr wrap="square">
+            <a:spAutoFit/>
+          </a:bodyPr>
+          <a:lstStyle/>
+          <a:p>
+            <a:pPr algn="l"/>
+            <a:r>
+              <a:rPr sz="2800" b="1">
+                <a:solidFill>
+                  <a:srgbClr val="FFFFFF"/>
+                </a:solidFill>
+              </a:rPr>
+              <a:t>분석 가능 종목 (8개)</a:t>
+            </a:r>
+          </a:p>
+        </p:txBody>
+      </p:sp>
+      <p:sp>
+        <p:nvSpPr>
+          <p:cNvPr id="4" name="TextBox 3"/>
+          <p:cNvSpPr txBox="1"/>
+          <p:nvPr/>
+        </p:nvSpPr>
+        <p:spPr>
+          <a:xfrm>
+            <a:off x="365760" y="594360"/>
+            <a:ext cx="10972800" cy="320040"/>
+          </a:xfrm>
+          <a:prstGeom prst="rect">
+            <a:avLst/>
+          </a:prstGeom>
+          <a:noFill/>
+        </p:spPr>
+        <p:txBody>
+          <a:bodyPr wrap="square">
+            <a:spAutoFit/>
+          </a:bodyPr>
+          <a:lstStyle/>
+          <a:p>
+            <a:pPr algn="l"/>
+            <a:r>
+              <a:rPr sz="1300" b="0">
+                <a:solidFill>
+                  <a:srgbClr val="CCDAFF"/>
+                </a:solidFill>
+              </a:rPr>
+              <a:t>뉴스 에이전트 지원 종목 — 공시·재무 에이전트는 모든 종목 지원</a:t>
+            </a:r>
+          </a:p>
+        </p:txBody>
+      </p:sp>
+      <p:sp>
+        <p:nvSpPr>
+          <p:cNvPr id="5" name="Rectangle 4"/>
+          <p:cNvSpPr/>
+          <p:nvPr/>
+        </p:nvSpPr>
+        <p:spPr>
+          <a:xfrm>
+            <a:off x="274320" y="1188720"/>
+            <a:ext cx="2788920" cy="2331720"/>
+          </a:xfrm>
+          <a:prstGeom prst="rect">
+            <a:avLst/>
+          </a:prstGeom>
+          <a:solidFill>
+            <a:srgbClr val="EEF2FF"/>
+          </a:solidFill>
+          <a:ln>
+            <a:noFill/>
+          </a:ln>
+        </p:spPr>
+        <p:style>
+          <a:lnRef idx="1">
+            <a:schemeClr val="accent1"/>
+          </a:lnRef>
+          <a:fillRef idx="3">
+            <a:schemeClr val="accent1"/>
+          </a:fillRef>
+          <a:effectRef idx="2">
+            <a:schemeClr val="accent1"/>
+          </a:effectRef>
+          <a:fontRef idx="minor">
+            <a:schemeClr val="lt1"/>
+          </a:fontRef>
+        </p:style>
+        <p:txBody>
+          <a:bodyPr rtlCol="0" anchor="ctr"/>
+          <a:lstStyle/>
+          <a:p>
+            <a:pPr algn="ctr"/>
+          </a:p>
+        </p:txBody>
+      </p:sp>
+      <p:sp>
+        <p:nvSpPr>
+          <p:cNvPr id="6" name="Rectangle 5"/>
+          <p:cNvSpPr/>
+          <p:nvPr/>
+        </p:nvSpPr>
+        <p:spPr>
+          <a:xfrm>
+            <a:off x="274320" y="1188720"/>
+            <a:ext cx="2788920" cy="384048"/>
+          </a:xfrm>
+          <a:prstGeom prst="rect">
+            <a:avLst/>
+          </a:prstGeom>
+          <a:solidFill>
+            <a:srgbClr val="1A7A4A"/>
+          </a:solidFill>
+          <a:ln>
+            <a:noFill/>
+          </a:ln>
+        </p:spPr>
+        <p:style>
+          <a:lnRef idx="1">
+            <a:schemeClr val="accent1"/>
+          </a:lnRef>
+          <a:fillRef idx="3">
+            <a:schemeClr val="accent1"/>
+          </a:fillRef>
+          <a:effectRef idx="2">
+            <a:schemeClr val="accent1"/>
+          </a:effectRef>
+          <a:fontRef idx="minor">
+            <a:schemeClr val="lt1"/>
+          </a:fontRef>
+        </p:style>
+        <p:txBody>
+          <a:bodyPr rtlCol="0" anchor="ctr"/>
+          <a:lstStyle/>
+          <a:p>
+            <a:pPr algn="ctr"/>
+          </a:p>
+        </p:txBody>
+      </p:sp>
+      <p:sp>
+        <p:nvSpPr>
+          <p:cNvPr id="7" name="TextBox 6"/>
+          <p:cNvSpPr txBox="1"/>
+          <p:nvPr/>
+        </p:nvSpPr>
+        <p:spPr>
+          <a:xfrm>
+            <a:off x="274320" y="1188720"/>
+            <a:ext cx="2788920" cy="384048"/>
+          </a:xfrm>
+          <a:prstGeom prst="rect">
+            <a:avLst/>
+          </a:prstGeom>
+          <a:noFill/>
+        </p:spPr>
+        <p:txBody>
+          <a:bodyPr wrap="square">
+            <a:spAutoFit/>
+          </a:bodyPr>
+          <a:lstStyle/>
+          <a:p>
+            <a:pPr algn="ctr"/>
+            <a:r>
+              <a:rPr sz="1400" b="1">
+                <a:solidFill>
+                  <a:srgbClr val="FFFFFF"/>
+                </a:solidFill>
+              </a:rPr>
+              <a:t>삼성전자</a:t>
+            </a:r>
+          </a:p>
+        </p:txBody>
+      </p:sp>
+      <p:sp>
+        <p:nvSpPr>
+          <p:cNvPr id="8" name="TextBox 7"/>
+          <p:cNvSpPr txBox="1"/>
+          <p:nvPr/>
+        </p:nvSpPr>
+        <p:spPr>
+          <a:xfrm>
+            <a:off x="365760" y="1664208"/>
+            <a:ext cx="2606040" cy="320040"/>
+          </a:xfrm>
+          <a:prstGeom prst="rect">
+            <a:avLst/>
+          </a:prstGeom>
+          <a:noFill/>
+        </p:spPr>
+        <p:txBody>
+          <a:bodyPr wrap="square">
+            <a:spAutoFit/>
+          </a:bodyPr>
+          <a:lstStyle/>
+          <a:p>
+            <a:pPr algn="l"/>
+            <a:r>
+              <a:rPr sz="1200" b="1">
+                <a:solidFill>
+                  <a:srgbClr val="1A7A4A"/>
+                </a:solidFill>
+              </a:rPr>
+              <a:t>005930</a:t>
+            </a:r>
+          </a:p>
+        </p:txBody>
+      </p:sp>
+      <p:sp>
+        <p:nvSpPr>
+          <p:cNvPr id="9" name="TextBox 8"/>
+          <p:cNvSpPr txBox="1"/>
+          <p:nvPr/>
+        </p:nvSpPr>
+        <p:spPr>
+          <a:xfrm>
+            <a:off x="365760" y="1993392"/>
+            <a:ext cx="2606040" cy="320040"/>
+          </a:xfrm>
+          <a:prstGeom prst="rect">
+            <a:avLst/>
+          </a:prstGeom>
+          <a:noFill/>
+        </p:spPr>
+        <p:txBody>
+          <a:bodyPr wrap="square">
+            <a:spAutoFit/>
+          </a:bodyPr>
+          <a:lstStyle/>
+          <a:p>
+            <a:pPr algn="l"/>
+            <a:r>
+              <a:rPr sz="1100" b="0">
+                <a:solidFill>
+                  <a:srgbClr val="5A6A9E"/>
+                </a:solidFill>
+              </a:rPr>
+              <a:t>반도체 · 전자</a:t>
+            </a:r>
+          </a:p>
+        </p:txBody>
+      </p:sp>
+      <p:sp>
+        <p:nvSpPr>
+          <p:cNvPr id="10" name="TextBox 9"/>
+          <p:cNvSpPr txBox="1"/>
+          <p:nvPr/>
+        </p:nvSpPr>
+        <p:spPr>
+          <a:xfrm>
+            <a:off x="365760" y="2423160"/>
+            <a:ext cx="2606040" cy="868680"/>
+          </a:xfrm>
+          <a:prstGeom prst="rect">
+            <a:avLst/>
+          </a:prstGeom>
+          <a:noFill/>
+        </p:spPr>
+        <p:txBody>
+          <a:bodyPr wrap="square">
+            <a:spAutoFit/>
+          </a:bodyPr>
+          <a:lstStyle/>
+          <a:p>
+            <a:pPr algn="l"/>
+            <a:r>
+              <a:rPr sz="1000" b="0">
+                <a:solidFill>
+                  <a:srgbClr val="1A2B55"/>
+                </a:solidFill>
+              </a:rPr>
+              <a:t>"삼성전자 투자해도 될까요?"</a:t>
+            </a:r>
+          </a:p>
+        </p:txBody>
+      </p:sp>
+      <p:sp>
+        <p:nvSpPr>
+          <p:cNvPr id="11" name="Rectangle 10"/>
+          <p:cNvSpPr/>
+          <p:nvPr/>
+        </p:nvSpPr>
+        <p:spPr>
+          <a:xfrm>
+            <a:off x="3246120" y="1188720"/>
+            <a:ext cx="2788920" cy="2331720"/>
+          </a:xfrm>
+          <a:prstGeom prst="rect">
+            <a:avLst/>
+          </a:prstGeom>
+          <a:solidFill>
+            <a:srgbClr val="EEF2FF"/>
+          </a:solidFill>
+          <a:ln>
+            <a:noFill/>
+          </a:ln>
+        </p:spPr>
+        <p:style>
+          <a:lnRef idx="1">
+            <a:schemeClr val="accent1"/>
+          </a:lnRef>
+          <a:fillRef idx="3">
+            <a:schemeClr val="accent1"/>
+          </a:fillRef>
+          <a:effectRef idx="2">
+            <a:schemeClr val="accent1"/>
+          </a:effectRef>
+          <a:fontRef idx="minor">
+            <a:schemeClr val="lt1"/>
+          </a:fontRef>
+        </p:style>
+        <p:txBody>
+          <a:bodyPr rtlCol="0" anchor="ctr"/>
+          <a:lstStyle/>
+          <a:p>
+            <a:pPr algn="ctr"/>
+          </a:p>
+        </p:txBody>
+      </p:sp>
+      <p:sp>
+        <p:nvSpPr>
+          <p:cNvPr id="12" name="Rectangle 11"/>
+          <p:cNvSpPr/>
+          <p:nvPr/>
+        </p:nvSpPr>
+        <p:spPr>
+          <a:xfrm>
+            <a:off x="3246120" y="1188720"/>
+            <a:ext cx="2788920" cy="384048"/>
+          </a:xfrm>
+          <a:prstGeom prst="rect">
+            <a:avLst/>
+          </a:prstGeom>
+          <a:solidFill>
+            <a:srgbClr val="3A59D1"/>
+          </a:solidFill>
+          <a:ln>
+            <a:noFill/>
+          </a:ln>
+        </p:spPr>
+        <p:style>
+          <a:lnRef idx="1">
+            <a:schemeClr val="accent1"/>
+          </a:lnRef>
+          <a:fillRef idx="3">
+            <a:schemeClr val="accent1"/>
+          </a:fillRef>
+          <a:effectRef idx="2">
+            <a:schemeClr val="accent1"/>
+          </a:effectRef>
+          <a:fontRef idx="minor">
+            <a:schemeClr val="lt1"/>
+          </a:fontRef>
+        </p:style>
+        <p:txBody>
+          <a:bodyPr rtlCol="0" anchor="ctr"/>
+          <a:lstStyle/>
+          <a:p>
+            <a:pPr algn="ctr"/>
+          </a:p>
+        </p:txBody>
+      </p:sp>
+      <p:sp>
+        <p:nvSpPr>
+          <p:cNvPr id="13" name="TextBox 12"/>
+          <p:cNvSpPr txBox="1"/>
+          <p:nvPr/>
+        </p:nvSpPr>
+        <p:spPr>
+          <a:xfrm>
+            <a:off x="3246120" y="1188720"/>
+            <a:ext cx="2788920" cy="384048"/>
+          </a:xfrm>
+          <a:prstGeom prst="rect">
+            <a:avLst/>
+          </a:prstGeom>
+          <a:noFill/>
+        </p:spPr>
+        <p:txBody>
+          <a:bodyPr wrap="square">
+            <a:spAutoFit/>
+          </a:bodyPr>
+          <a:lstStyle/>
+          <a:p>
+            <a:pPr algn="ctr"/>
+            <a:r>
+              <a:rPr sz="1400" b="1">
+                <a:solidFill>
+                  <a:srgbClr val="FFFFFF"/>
+                </a:solidFill>
+              </a:rPr>
+              <a:t>SK하이닉스</a:t>
+            </a:r>
+          </a:p>
+        </p:txBody>
+      </p:sp>
+      <p:sp>
+        <p:nvSpPr>
+          <p:cNvPr id="14" name="TextBox 13"/>
+          <p:cNvSpPr txBox="1"/>
+          <p:nvPr/>
+        </p:nvSpPr>
+        <p:spPr>
+          <a:xfrm>
+            <a:off x="3337560" y="1664208"/>
+            <a:ext cx="2606040" cy="320040"/>
+          </a:xfrm>
+          <a:prstGeom prst="rect">
+            <a:avLst/>
+          </a:prstGeom>
+          <a:noFill/>
+        </p:spPr>
+        <p:txBody>
+          <a:bodyPr wrap="square">
+            <a:spAutoFit/>
+          </a:bodyPr>
+          <a:lstStyle/>
+          <a:p>
+            <a:pPr algn="l"/>
+            <a:r>
+              <a:rPr sz="1200" b="1">
+                <a:solidFill>
+                  <a:srgbClr val="3A59D1"/>
+                </a:solidFill>
+              </a:rPr>
+              <a:t>000660</a:t>
+            </a:r>
+          </a:p>
+        </p:txBody>
+      </p:sp>
+      <p:sp>
+        <p:nvSpPr>
+          <p:cNvPr id="15" name="TextBox 14"/>
+          <p:cNvSpPr txBox="1"/>
+          <p:nvPr/>
+        </p:nvSpPr>
+        <p:spPr>
+          <a:xfrm>
+            <a:off x="3337560" y="1993392"/>
+            <a:ext cx="2606040" cy="320040"/>
+          </a:xfrm>
+          <a:prstGeom prst="rect">
+            <a:avLst/>
+          </a:prstGeom>
+          <a:noFill/>
+        </p:spPr>
+        <p:txBody>
+          <a:bodyPr wrap="square">
+            <a:spAutoFit/>
+          </a:bodyPr>
+          <a:lstStyle/>
+          <a:p>
+            <a:pPr algn="l"/>
+            <a:r>
+              <a:rPr sz="1100" b="0">
+                <a:solidFill>
+                  <a:srgbClr val="5A6A9E"/>
+                </a:solidFill>
+              </a:rPr>
+              <a:t>HBM · 메모리</a:t>
+            </a:r>
+          </a:p>
+        </p:txBody>
+      </p:sp>
+      <p:sp>
+        <p:nvSpPr>
+          <p:cNvPr id="16" name="TextBox 15"/>
+          <p:cNvSpPr txBox="1"/>
+          <p:nvPr/>
+        </p:nvSpPr>
+        <p:spPr>
+          <a:xfrm>
+            <a:off x="3337560" y="2423160"/>
+            <a:ext cx="2606040" cy="868680"/>
+          </a:xfrm>
+          <a:prstGeom prst="rect">
+            <a:avLst/>
+          </a:prstGeom>
+          <a:noFill/>
+        </p:spPr>
+        <p:txBody>
+          <a:bodyPr wrap="square">
+            <a:spAutoFit/>
+          </a:bodyPr>
+          <a:lstStyle/>
+          <a:p>
+            <a:pPr algn="l"/>
+            <a:r>
+              <a:rPr sz="1000" b="0">
+                <a:solidFill>
+                  <a:srgbClr val="1A2B55"/>
+                </a:solidFill>
+              </a:rPr>
+              <a:t>"HBM 실적 기대되는데 투자해도 될까?"</a:t>
+            </a:r>
+          </a:p>
+        </p:txBody>
+      </p:sp>
+      <p:sp>
+        <p:nvSpPr>
+          <p:cNvPr id="17" name="Rectangle 16"/>
+          <p:cNvSpPr/>
+          <p:nvPr/>
+        </p:nvSpPr>
+        <p:spPr>
+          <a:xfrm>
+            <a:off x="6217920" y="1188720"/>
+            <a:ext cx="2788920" cy="2331720"/>
+          </a:xfrm>
+          <a:prstGeom prst="rect">
+            <a:avLst/>
+          </a:prstGeom>
+          <a:solidFill>
+            <a:srgbClr val="EEF2FF"/>
+          </a:solidFill>
+          <a:ln>
+            <a:noFill/>
+          </a:ln>
+        </p:spPr>
+        <p:style>
+          <a:lnRef idx="1">
+            <a:schemeClr val="accent1"/>
+          </a:lnRef>
+          <a:fillRef idx="3">
+            <a:schemeClr val="accent1"/>
+          </a:fillRef>
+          <a:effectRef idx="2">
+            <a:schemeClr val="accent1"/>
+          </a:effectRef>
+          <a:fontRef idx="minor">
+            <a:schemeClr val="lt1"/>
+          </a:fontRef>
+        </p:style>
+        <p:txBody>
+          <a:bodyPr rtlCol="0" anchor="ctr"/>
+          <a:lstStyle/>
+          <a:p>
+            <a:pPr algn="ctr"/>
+          </a:p>
+        </p:txBody>
+      </p:sp>
+      <p:sp>
+        <p:nvSpPr>
+          <p:cNvPr id="18" name="Rectangle 17"/>
+          <p:cNvSpPr/>
+          <p:nvPr/>
+        </p:nvSpPr>
+        <p:spPr>
+          <a:xfrm>
+            <a:off x="6217920" y="1188720"/>
+            <a:ext cx="2788920" cy="384048"/>
+          </a:xfrm>
+          <a:prstGeom prst="rect">
+            <a:avLst/>
+          </a:prstGeom>
+          <a:solidFill>
+            <a:srgbClr val="B86C00"/>
+          </a:solidFill>
+          <a:ln>
+            <a:noFill/>
+          </a:ln>
+        </p:spPr>
+        <p:style>
+          <a:lnRef idx="1">
+            <a:schemeClr val="accent1"/>
+          </a:lnRef>
+          <a:fillRef idx="3">
+            <a:schemeClr val="accent1"/>
+          </a:fillRef>
+          <a:effectRef idx="2">
+            <a:schemeClr val="accent1"/>
+          </a:effectRef>
+          <a:fontRef idx="minor">
+            <a:schemeClr val="lt1"/>
+          </a:fontRef>
+        </p:style>
+        <p:txBody>
+          <a:bodyPr rtlCol="0" anchor="ctr"/>
+          <a:lstStyle/>
+          <a:p>
+            <a:pPr algn="ctr"/>
+          </a:p>
+        </p:txBody>
+      </p:sp>
+      <p:sp>
+        <p:nvSpPr>
+          <p:cNvPr id="19" name="TextBox 18"/>
+          <p:cNvSpPr txBox="1"/>
+          <p:nvPr/>
+        </p:nvSpPr>
+        <p:spPr>
+          <a:xfrm>
+            <a:off x="6217920" y="1188720"/>
+            <a:ext cx="2788920" cy="384048"/>
+          </a:xfrm>
+          <a:prstGeom prst="rect">
+            <a:avLst/>
+          </a:prstGeom>
+          <a:noFill/>
+        </p:spPr>
+        <p:txBody>
+          <a:bodyPr wrap="square">
+            <a:spAutoFit/>
+          </a:bodyPr>
+          <a:lstStyle/>
+          <a:p>
+            <a:pPr algn="ctr"/>
+            <a:r>
+              <a:rPr sz="1400" b="1">
+                <a:solidFill>
+                  <a:srgbClr val="FFFFFF"/>
+                </a:solidFill>
+              </a:rPr>
+              <a:t>현대차</a:t>
+            </a:r>
+          </a:p>
+        </p:txBody>
+      </p:sp>
+      <p:sp>
+        <p:nvSpPr>
+          <p:cNvPr id="20" name="TextBox 19"/>
+          <p:cNvSpPr txBox="1"/>
+          <p:nvPr/>
+        </p:nvSpPr>
+        <p:spPr>
+          <a:xfrm>
+            <a:off x="6309359" y="1664208"/>
+            <a:ext cx="2606040" cy="320040"/>
+          </a:xfrm>
+          <a:prstGeom prst="rect">
+            <a:avLst/>
+          </a:prstGeom>
+          <a:noFill/>
+        </p:spPr>
+        <p:txBody>
+          <a:bodyPr wrap="square">
+            <a:spAutoFit/>
+          </a:bodyPr>
+          <a:lstStyle/>
+          <a:p>
+            <a:pPr algn="l"/>
+            <a:r>
+              <a:rPr sz="1200" b="1">
+                <a:solidFill>
+                  <a:srgbClr val="B86C00"/>
+                </a:solidFill>
+              </a:rPr>
+              <a:t>005380</a:t>
+            </a:r>
+          </a:p>
+        </p:txBody>
+      </p:sp>
+      <p:sp>
+        <p:nvSpPr>
+          <p:cNvPr id="21" name="TextBox 20"/>
+          <p:cNvSpPr txBox="1"/>
+          <p:nvPr/>
+        </p:nvSpPr>
+        <p:spPr>
+          <a:xfrm>
+            <a:off x="6309359" y="1993392"/>
+            <a:ext cx="2606040" cy="320040"/>
+          </a:xfrm>
+          <a:prstGeom prst="rect">
+            <a:avLst/>
+          </a:prstGeom>
+          <a:noFill/>
+        </p:spPr>
+        <p:txBody>
+          <a:bodyPr wrap="square">
+            <a:spAutoFit/>
+          </a:bodyPr>
+          <a:lstStyle/>
+          <a:p>
+            <a:pPr algn="l"/>
+            <a:r>
+              <a:rPr sz="1100" b="0">
+                <a:solidFill>
+                  <a:srgbClr val="5A6A9E"/>
+                </a:solidFill>
+              </a:rPr>
+              <a:t>전기차 · 모빌리티</a:t>
+            </a:r>
+          </a:p>
+        </p:txBody>
+      </p:sp>
+      <p:sp>
+        <p:nvSpPr>
+          <p:cNvPr id="22" name="TextBox 21"/>
+          <p:cNvSpPr txBox="1"/>
+          <p:nvPr/>
+        </p:nvSpPr>
+        <p:spPr>
+          <a:xfrm>
+            <a:off x="6309359" y="2423160"/>
+            <a:ext cx="2606040" cy="868680"/>
+          </a:xfrm>
+          <a:prstGeom prst="rect">
+            <a:avLst/>
+          </a:prstGeom>
+          <a:noFill/>
+        </p:spPr>
+        <p:txBody>
+          <a:bodyPr wrap="square">
+            <a:spAutoFit/>
+          </a:bodyPr>
+          <a:lstStyle/>
+          <a:p>
+            <a:pPr algn="l"/>
+            <a:r>
+              <a:rPr sz="1000" b="0">
+                <a:solidFill>
+                  <a:srgbClr val="1A2B55"/>
+                </a:solidFill>
+              </a:rPr>
+              <a:t>"전기차 전환 어떻게 보고 있어?"</a:t>
+            </a:r>
+          </a:p>
+        </p:txBody>
+      </p:sp>
+      <p:sp>
+        <p:nvSpPr>
+          <p:cNvPr id="23" name="Rectangle 22"/>
+          <p:cNvSpPr/>
+          <p:nvPr/>
+        </p:nvSpPr>
+        <p:spPr>
+          <a:xfrm>
+            <a:off x="9189720" y="1188720"/>
+            <a:ext cx="2788920" cy="2331720"/>
+          </a:xfrm>
+          <a:prstGeom prst="rect">
+            <a:avLst/>
+          </a:prstGeom>
+          <a:solidFill>
+            <a:srgbClr val="EEF2FF"/>
+          </a:solidFill>
+          <a:ln>
+            <a:noFill/>
+          </a:ln>
+        </p:spPr>
+        <p:style>
+          <a:lnRef idx="1">
+            <a:schemeClr val="accent1"/>
+          </a:lnRef>
+          <a:fillRef idx="3">
+            <a:schemeClr val="accent1"/>
+          </a:fillRef>
+          <a:effectRef idx="2">
+            <a:schemeClr val="accent1"/>
+          </a:effectRef>
+          <a:fontRef idx="minor">
+            <a:schemeClr val="lt1"/>
+          </a:fontRef>
+        </p:style>
+        <p:txBody>
+          <a:bodyPr rtlCol="0" anchor="ctr"/>
+          <a:lstStyle/>
+          <a:p>
+            <a:pPr algn="ctr"/>
+          </a:p>
+        </p:txBody>
+      </p:sp>
+      <p:sp>
+        <p:nvSpPr>
+          <p:cNvPr id="24" name="Rectangle 23"/>
+          <p:cNvSpPr/>
+          <p:nvPr/>
+        </p:nvSpPr>
+        <p:spPr>
+          <a:xfrm>
+            <a:off x="9189720" y="1188720"/>
+            <a:ext cx="2788920" cy="384048"/>
+          </a:xfrm>
+          <a:prstGeom prst="rect">
+            <a:avLst/>
+          </a:prstGeom>
+          <a:solidFill>
+            <a:srgbClr val="1A7A4A"/>
+          </a:solidFill>
+          <a:ln>
+            <a:noFill/>
+          </a:ln>
+        </p:spPr>
+        <p:style>
+          <a:lnRef idx="1">
+            <a:schemeClr val="accent1"/>
+          </a:lnRef>
+          <a:fillRef idx="3">
+            <a:schemeClr val="accent1"/>
+          </a:fillRef>
+          <a:effectRef idx="2">
+            <a:schemeClr val="accent1"/>
+          </a:effectRef>
+          <a:fontRef idx="minor">
+            <a:schemeClr val="lt1"/>
+          </a:fontRef>
+        </p:style>
+        <p:txBody>
+          <a:bodyPr rtlCol="0" anchor="ctr"/>
+          <a:lstStyle/>
+          <a:p>
+            <a:pPr algn="ctr"/>
+          </a:p>
+        </p:txBody>
+      </p:sp>
+      <p:sp>
+        <p:nvSpPr>
+          <p:cNvPr id="25" name="TextBox 24"/>
+          <p:cNvSpPr txBox="1"/>
+          <p:nvPr/>
+        </p:nvSpPr>
+        <p:spPr>
+          <a:xfrm>
+            <a:off x="9189720" y="1188720"/>
+            <a:ext cx="2788920" cy="384048"/>
+          </a:xfrm>
+          <a:prstGeom prst="rect">
+            <a:avLst/>
+          </a:prstGeom>
+          <a:noFill/>
+        </p:spPr>
+        <p:txBody>
+          <a:bodyPr wrap="square">
+            <a:spAutoFit/>
+          </a:bodyPr>
+          <a:lstStyle/>
+          <a:p>
+            <a:pPr algn="ctr"/>
+            <a:r>
+              <a:rPr sz="1400" b="1">
+                <a:solidFill>
+                  <a:srgbClr val="FFFFFF"/>
+                </a:solidFill>
+              </a:rPr>
+              <a:t>네이버</a:t>
+            </a:r>
+          </a:p>
+        </p:txBody>
+      </p:sp>
+      <p:sp>
+        <p:nvSpPr>
+          <p:cNvPr id="26" name="TextBox 25"/>
+          <p:cNvSpPr txBox="1"/>
+          <p:nvPr/>
+        </p:nvSpPr>
+        <p:spPr>
+          <a:xfrm>
+            <a:off x="9281160" y="1664208"/>
+            <a:ext cx="2606040" cy="320040"/>
+          </a:xfrm>
+          <a:prstGeom prst="rect">
+            <a:avLst/>
+          </a:prstGeom>
+          <a:noFill/>
+        </p:spPr>
+        <p:txBody>
+          <a:bodyPr wrap="square">
+            <a:spAutoFit/>
+          </a:bodyPr>
+          <a:lstStyle/>
+          <a:p>
+            <a:pPr algn="l"/>
+            <a:r>
+              <a:rPr sz="1200" b="1">
+                <a:solidFill>
+                  <a:srgbClr val="1A7A4A"/>
+                </a:solidFill>
+              </a:rPr>
+              <a:t>035420</a:t>
+            </a:r>
+          </a:p>
+        </p:txBody>
+      </p:sp>
+      <p:sp>
+        <p:nvSpPr>
+          <p:cNvPr id="27" name="TextBox 26"/>
+          <p:cNvSpPr txBox="1"/>
+          <p:nvPr/>
+        </p:nvSpPr>
+        <p:spPr>
+          <a:xfrm>
+            <a:off x="9281160" y="1993392"/>
+            <a:ext cx="2606040" cy="320040"/>
+          </a:xfrm>
+          <a:prstGeom prst="rect">
+            <a:avLst/>
+          </a:prstGeom>
+          <a:noFill/>
+        </p:spPr>
+        <p:txBody>
+          <a:bodyPr wrap="square">
+            <a:spAutoFit/>
+          </a:bodyPr>
+          <a:lstStyle/>
+          <a:p>
+            <a:pPr algn="l"/>
+            <a:r>
+              <a:rPr sz="1100" b="0">
+                <a:solidFill>
+                  <a:srgbClr val="5A6A9E"/>
+                </a:solidFill>
+              </a:rPr>
+              <a:t>AI · 플랫폼</a:t>
+            </a:r>
+          </a:p>
+        </p:txBody>
+      </p:sp>
+      <p:sp>
+        <p:nvSpPr>
+          <p:cNvPr id="28" name="TextBox 27"/>
+          <p:cNvSpPr txBox="1"/>
+          <p:nvPr/>
+        </p:nvSpPr>
+        <p:spPr>
+          <a:xfrm>
+            <a:off x="9281160" y="2423160"/>
+            <a:ext cx="2606040" cy="868680"/>
+          </a:xfrm>
+          <a:prstGeom prst="rect">
+            <a:avLst/>
+          </a:prstGeom>
+          <a:noFill/>
+        </p:spPr>
+        <p:txBody>
+          <a:bodyPr wrap="square">
+            <a:spAutoFit/>
+          </a:bodyPr>
+          <a:lstStyle/>
+          <a:p>
+            <a:pPr algn="l"/>
+            <a:r>
+              <a:rPr sz="1000" b="0">
+                <a:solidFill>
+                  <a:srgbClr val="1A2B55"/>
+                </a:solidFill>
+              </a:rPr>
+              <a:t>"AI 사업 성장 가능성 어때?"</a:t>
+            </a:r>
+          </a:p>
+        </p:txBody>
+      </p:sp>
+      <p:sp>
+        <p:nvSpPr>
+          <p:cNvPr id="29" name="Rectangle 28"/>
+          <p:cNvSpPr/>
+          <p:nvPr/>
+        </p:nvSpPr>
+        <p:spPr>
+          <a:xfrm>
+            <a:off x="274320" y="3840480"/>
+            <a:ext cx="2788920" cy="2331720"/>
+          </a:xfrm>
+          <a:prstGeom prst="rect">
+            <a:avLst/>
+          </a:prstGeom>
+          <a:solidFill>
+            <a:srgbClr val="EEF2FF"/>
+          </a:solidFill>
+          <a:ln>
+            <a:noFill/>
+          </a:ln>
+        </p:spPr>
+        <p:style>
+          <a:lnRef idx="1">
+            <a:schemeClr val="accent1"/>
+          </a:lnRef>
+          <a:fillRef idx="3">
+            <a:schemeClr val="accent1"/>
+          </a:fillRef>
+          <a:effectRef idx="2">
+            <a:schemeClr val="accent1"/>
+          </a:effectRef>
+          <a:fontRef idx="minor">
+            <a:schemeClr val="lt1"/>
+          </a:fontRef>
+        </p:style>
+        <p:txBody>
+          <a:bodyPr rtlCol="0" anchor="ctr"/>
+          <a:lstStyle/>
+          <a:p>
+            <a:pPr algn="ctr"/>
+          </a:p>
+        </p:txBody>
+      </p:sp>
+      <p:sp>
+        <p:nvSpPr>
+          <p:cNvPr id="30" name="Rectangle 29"/>
+          <p:cNvSpPr/>
+          <p:nvPr/>
+        </p:nvSpPr>
+        <p:spPr>
+          <a:xfrm>
+            <a:off x="274320" y="3840480"/>
+            <a:ext cx="2788920" cy="384048"/>
+          </a:xfrm>
+          <a:prstGeom prst="rect">
+            <a:avLst/>
+          </a:prstGeom>
+          <a:solidFill>
+            <a:srgbClr val="3A59D1"/>
+          </a:solidFill>
+          <a:ln>
+            <a:noFill/>
+          </a:ln>
+        </p:spPr>
+        <p:style>
+          <a:lnRef idx="1">
+            <a:schemeClr val="accent1"/>
+          </a:lnRef>
+          <a:fillRef idx="3">
+            <a:schemeClr val="accent1"/>
+          </a:fillRef>
+          <a:effectRef idx="2">
+            <a:schemeClr val="accent1"/>
+          </a:effectRef>
+          <a:fontRef idx="minor">
+            <a:schemeClr val="lt1"/>
+          </a:fontRef>
+        </p:style>
+        <p:txBody>
+          <a:bodyPr rtlCol="0" anchor="ctr"/>
+          <a:lstStyle/>
+          <a:p>
+            <a:pPr algn="ctr"/>
+          </a:p>
+        </p:txBody>
+      </p:sp>
+      <p:sp>
+        <p:nvSpPr>
+          <p:cNvPr id="31" name="TextBox 30"/>
+          <p:cNvSpPr txBox="1"/>
+          <p:nvPr/>
+        </p:nvSpPr>
+        <p:spPr>
+          <a:xfrm>
+            <a:off x="274320" y="3840480"/>
+            <a:ext cx="2788920" cy="384048"/>
+          </a:xfrm>
+          <a:prstGeom prst="rect">
+            <a:avLst/>
+          </a:prstGeom>
+          <a:noFill/>
+        </p:spPr>
+        <p:txBody>
+          <a:bodyPr wrap="square">
+            <a:spAutoFit/>
+          </a:bodyPr>
+          <a:lstStyle/>
+          <a:p>
+            <a:pPr algn="ctr"/>
+            <a:r>
+              <a:rPr sz="1400" b="1">
+                <a:solidFill>
+                  <a:srgbClr val="FFFFFF"/>
+                </a:solidFill>
+              </a:rPr>
+              <a:t>카카오</a:t>
+            </a:r>
+          </a:p>
+        </p:txBody>
+      </p:sp>
+      <p:sp>
+        <p:nvSpPr>
+          <p:cNvPr id="32" name="TextBox 31"/>
+          <p:cNvSpPr txBox="1"/>
+          <p:nvPr/>
+        </p:nvSpPr>
+        <p:spPr>
+          <a:xfrm>
+            <a:off x="365760" y="4315968"/>
+            <a:ext cx="2606040" cy="320040"/>
+          </a:xfrm>
+          <a:prstGeom prst="rect">
+            <a:avLst/>
+          </a:prstGeom>
+          <a:noFill/>
+        </p:spPr>
+        <p:txBody>
+          <a:bodyPr wrap="square">
+            <a:spAutoFit/>
+          </a:bodyPr>
+          <a:lstStyle/>
+          <a:p>
+            <a:pPr algn="l"/>
+            <a:r>
+              <a:rPr sz="1200" b="1">
+                <a:solidFill>
+                  <a:srgbClr val="3A59D1"/>
+                </a:solidFill>
+              </a:rPr>
+              <a:t>035720</a:t>
+            </a:r>
+          </a:p>
+        </p:txBody>
+      </p:sp>
+      <p:sp>
+        <p:nvSpPr>
+          <p:cNvPr id="33" name="TextBox 32"/>
+          <p:cNvSpPr txBox="1"/>
+          <p:nvPr/>
+        </p:nvSpPr>
+        <p:spPr>
+          <a:xfrm>
+            <a:off x="365760" y="4645152"/>
+            <a:ext cx="2606040" cy="320040"/>
+          </a:xfrm>
+          <a:prstGeom prst="rect">
+            <a:avLst/>
+          </a:prstGeom>
+          <a:noFill/>
+        </p:spPr>
+        <p:txBody>
+          <a:bodyPr wrap="square">
+            <a:spAutoFit/>
+          </a:bodyPr>
+          <a:lstStyle/>
+          <a:p>
+            <a:pPr algn="l"/>
+            <a:r>
+              <a:rPr sz="1100" b="0">
+                <a:solidFill>
+                  <a:srgbClr val="5A6A9E"/>
+                </a:solidFill>
+              </a:rPr>
+              <a:t>플랫폼 · 콘텐츠</a:t>
+            </a:r>
+          </a:p>
+        </p:txBody>
+      </p:sp>
+      <p:sp>
+        <p:nvSpPr>
+          <p:cNvPr id="34" name="TextBox 33"/>
+          <p:cNvSpPr txBox="1"/>
+          <p:nvPr/>
+        </p:nvSpPr>
+        <p:spPr>
+          <a:xfrm>
+            <a:off x="365760" y="5074920"/>
+            <a:ext cx="2606040" cy="868680"/>
+          </a:xfrm>
+          <a:prstGeom prst="rect">
+            <a:avLst/>
+          </a:prstGeom>
+          <a:noFill/>
+        </p:spPr>
+        <p:txBody>
+          <a:bodyPr wrap="square">
+            <a:spAutoFit/>
+          </a:bodyPr>
+          <a:lstStyle/>
+          <a:p>
+            <a:pPr algn="l"/>
+            <a:r>
+              <a:rPr sz="1000" b="0">
+                <a:solidFill>
+                  <a:srgbClr val="1A2B55"/>
+                </a:solidFill>
+              </a:rPr>
+              <a:t>"지금 저점 매수 타이밍일까?"</a:t>
+            </a:r>
+          </a:p>
+        </p:txBody>
+      </p:sp>
+      <p:sp>
+        <p:nvSpPr>
+          <p:cNvPr id="35" name="Rectangle 34"/>
+          <p:cNvSpPr/>
+          <p:nvPr/>
+        </p:nvSpPr>
+        <p:spPr>
+          <a:xfrm>
+            <a:off x="3246120" y="3840480"/>
+            <a:ext cx="2788920" cy="2331720"/>
+          </a:xfrm>
+          <a:prstGeom prst="rect">
+            <a:avLst/>
+          </a:prstGeom>
+          <a:solidFill>
+            <a:srgbClr val="EEF2FF"/>
+          </a:solidFill>
+          <a:ln>
+            <a:noFill/>
+          </a:ln>
+        </p:spPr>
+        <p:style>
+          <a:lnRef idx="1">
+            <a:schemeClr val="accent1"/>
+          </a:lnRef>
+          <a:fillRef idx="3">
+            <a:schemeClr val="accent1"/>
+          </a:fillRef>
+          <a:effectRef idx="2">
+            <a:schemeClr val="accent1"/>
+          </a:effectRef>
+          <a:fontRef idx="minor">
+            <a:schemeClr val="lt1"/>
+          </a:fontRef>
+        </p:style>
+        <p:txBody>
+          <a:bodyPr rtlCol="0" anchor="ctr"/>
+          <a:lstStyle/>
+          <a:p>
+            <a:pPr algn="ctr"/>
+          </a:p>
+        </p:txBody>
+      </p:sp>
+      <p:sp>
+        <p:nvSpPr>
+          <p:cNvPr id="36" name="Rectangle 35"/>
+          <p:cNvSpPr/>
+          <p:nvPr/>
+        </p:nvSpPr>
+        <p:spPr>
+          <a:xfrm>
+            <a:off x="3246120" y="3840480"/>
+            <a:ext cx="2788920" cy="384048"/>
+          </a:xfrm>
+          <a:prstGeom prst="rect">
+            <a:avLst/>
+          </a:prstGeom>
+          <a:solidFill>
+            <a:srgbClr val="B86C00"/>
+          </a:solidFill>
+          <a:ln>
+            <a:noFill/>
+          </a:ln>
+        </p:spPr>
+        <p:style>
+          <a:lnRef idx="1">
+            <a:schemeClr val="accent1"/>
+          </a:lnRef>
+          <a:fillRef idx="3">
+            <a:schemeClr val="accent1"/>
+          </a:fillRef>
+          <a:effectRef idx="2">
+            <a:schemeClr val="accent1"/>
+          </a:effectRef>
+          <a:fontRef idx="minor">
+            <a:schemeClr val="lt1"/>
+          </a:fontRef>
+        </p:style>
+        <p:txBody>
+          <a:bodyPr rtlCol="0" anchor="ctr"/>
+          <a:lstStyle/>
+          <a:p>
+            <a:pPr algn="ctr"/>
+          </a:p>
+        </p:txBody>
+      </p:sp>
+      <p:sp>
+        <p:nvSpPr>
+          <p:cNvPr id="37" name="TextBox 36"/>
+          <p:cNvSpPr txBox="1"/>
+          <p:nvPr/>
+        </p:nvSpPr>
+        <p:spPr>
+          <a:xfrm>
+            <a:off x="3246120" y="3840480"/>
+            <a:ext cx="2788920" cy="384048"/>
+          </a:xfrm>
+          <a:prstGeom prst="rect">
+            <a:avLst/>
+          </a:prstGeom>
+          <a:noFill/>
+        </p:spPr>
+        <p:txBody>
+          <a:bodyPr wrap="square">
+            <a:spAutoFit/>
+          </a:bodyPr>
+          <a:lstStyle/>
+          <a:p>
+            <a:pPr algn="ctr"/>
+            <a:r>
+              <a:rPr sz="1400" b="1">
+                <a:solidFill>
+                  <a:srgbClr val="FFFFFF"/>
+                </a:solidFill>
+              </a:rPr>
+              <a:t>셀트리온</a:t>
+            </a:r>
+          </a:p>
+        </p:txBody>
+      </p:sp>
+      <p:sp>
+        <p:nvSpPr>
+          <p:cNvPr id="38" name="TextBox 37"/>
+          <p:cNvSpPr txBox="1"/>
+          <p:nvPr/>
+        </p:nvSpPr>
+        <p:spPr>
+          <a:xfrm>
+            <a:off x="3337560" y="4315968"/>
+            <a:ext cx="2606040" cy="320040"/>
+          </a:xfrm>
+          <a:prstGeom prst="rect">
+            <a:avLst/>
+          </a:prstGeom>
+          <a:noFill/>
+        </p:spPr>
+        <p:txBody>
+          <a:bodyPr wrap="square">
+            <a:spAutoFit/>
+          </a:bodyPr>
+          <a:lstStyle/>
+          <a:p>
+            <a:pPr algn="l"/>
+            <a:r>
+              <a:rPr sz="1200" b="1">
+                <a:solidFill>
+                  <a:srgbClr val="B86C00"/>
+                </a:solidFill>
+              </a:rPr>
+              <a:t>068270</a:t>
+            </a:r>
+          </a:p>
+        </p:txBody>
+      </p:sp>
+      <p:sp>
+        <p:nvSpPr>
+          <p:cNvPr id="39" name="TextBox 38"/>
+          <p:cNvSpPr txBox="1"/>
+          <p:nvPr/>
+        </p:nvSpPr>
+        <p:spPr>
+          <a:xfrm>
+            <a:off x="3337560" y="4645152"/>
+            <a:ext cx="2606040" cy="320040"/>
+          </a:xfrm>
+          <a:prstGeom prst="rect">
+            <a:avLst/>
+          </a:prstGeom>
+          <a:noFill/>
+        </p:spPr>
+        <p:txBody>
+          <a:bodyPr wrap="square">
+            <a:spAutoFit/>
+          </a:bodyPr>
+          <a:lstStyle/>
+          <a:p>
+            <a:pPr algn="l"/>
+            <a:r>
+              <a:rPr sz="1100" b="0">
+                <a:solidFill>
+                  <a:srgbClr val="5A6A9E"/>
+                </a:solidFill>
+              </a:rPr>
+              <a:t>바이오시밀러</a:t>
+            </a:r>
+          </a:p>
+        </p:txBody>
+      </p:sp>
+      <p:sp>
+        <p:nvSpPr>
+          <p:cNvPr id="40" name="TextBox 39"/>
+          <p:cNvSpPr txBox="1"/>
+          <p:nvPr/>
+        </p:nvSpPr>
+        <p:spPr>
+          <a:xfrm>
+            <a:off x="3337560" y="5074920"/>
+            <a:ext cx="2606040" cy="868680"/>
+          </a:xfrm>
+          <a:prstGeom prst="rect">
+            <a:avLst/>
+          </a:prstGeom>
+          <a:noFill/>
+        </p:spPr>
+        <p:txBody>
+          <a:bodyPr wrap="square">
+            <a:spAutoFit/>
+          </a:bodyPr>
+          <a:lstStyle/>
+          <a:p>
+            <a:pPr algn="l"/>
+            <a:r>
+              <a:rPr sz="1000" b="0">
+                <a:solidFill>
+                  <a:srgbClr val="1A2B55"/>
+                </a:solidFill>
+              </a:rPr>
+              <a:t>"바이오시밀러 전망은?"</a:t>
+            </a:r>
+          </a:p>
+        </p:txBody>
+      </p:sp>
+      <p:sp>
+        <p:nvSpPr>
+          <p:cNvPr id="41" name="Rectangle 40"/>
+          <p:cNvSpPr/>
+          <p:nvPr/>
+        </p:nvSpPr>
+        <p:spPr>
+          <a:xfrm>
+            <a:off x="6217920" y="3840480"/>
+            <a:ext cx="2788920" cy="2331720"/>
+          </a:xfrm>
+          <a:prstGeom prst="rect">
+            <a:avLst/>
+          </a:prstGeom>
+          <a:solidFill>
+            <a:srgbClr val="EEF2FF"/>
+          </a:solidFill>
+          <a:ln>
+            <a:noFill/>
+          </a:ln>
+        </p:spPr>
+        <p:style>
+          <a:lnRef idx="1">
+            <a:schemeClr val="accent1"/>
+          </a:lnRef>
+          <a:fillRef idx="3">
+            <a:schemeClr val="accent1"/>
+          </a:fillRef>
+          <a:effectRef idx="2">
+            <a:schemeClr val="accent1"/>
+          </a:effectRef>
+          <a:fontRef idx="minor">
+            <a:schemeClr val="lt1"/>
+          </a:fontRef>
+        </p:style>
+        <p:txBody>
+          <a:bodyPr rtlCol="0" anchor="ctr"/>
+          <a:lstStyle/>
+          <a:p>
+            <a:pPr algn="ctr"/>
+          </a:p>
+        </p:txBody>
+      </p:sp>
+      <p:sp>
+        <p:nvSpPr>
+          <p:cNvPr id="42" name="Rectangle 41"/>
+          <p:cNvSpPr/>
+          <p:nvPr/>
+        </p:nvSpPr>
+        <p:spPr>
+          <a:xfrm>
+            <a:off x="6217920" y="3840480"/>
+            <a:ext cx="2788920" cy="384048"/>
+          </a:xfrm>
+          <a:prstGeom prst="rect">
+            <a:avLst/>
+          </a:prstGeom>
+          <a:solidFill>
+            <a:srgbClr val="1A7A4A"/>
+          </a:solidFill>
+          <a:ln>
+            <a:noFill/>
+          </a:ln>
+        </p:spPr>
+        <p:style>
+          <a:lnRef idx="1">
+            <a:schemeClr val="accent1"/>
+          </a:lnRef>
+          <a:fillRef idx="3">
+            <a:schemeClr val="accent1"/>
+          </a:fillRef>
+          <a:effectRef idx="2">
+            <a:schemeClr val="accent1"/>
+          </a:effectRef>
+          <a:fontRef idx="minor">
+            <a:schemeClr val="lt1"/>
+          </a:fontRef>
+        </p:style>
+        <p:txBody>
+          <a:bodyPr rtlCol="0" anchor="ctr"/>
+          <a:lstStyle/>
+          <a:p>
+            <a:pPr algn="ctr"/>
+          </a:p>
+        </p:txBody>
+      </p:sp>
+      <p:sp>
+        <p:nvSpPr>
+          <p:cNvPr id="43" name="TextBox 42"/>
+          <p:cNvSpPr txBox="1"/>
+          <p:nvPr/>
+        </p:nvSpPr>
+        <p:spPr>
+          <a:xfrm>
+            <a:off x="6217920" y="3840480"/>
+            <a:ext cx="2788920" cy="384048"/>
+          </a:xfrm>
+          <a:prstGeom prst="rect">
+            <a:avLst/>
+          </a:prstGeom>
+          <a:noFill/>
+        </p:spPr>
+        <p:txBody>
+          <a:bodyPr wrap="square">
+            <a:spAutoFit/>
+          </a:bodyPr>
+          <a:lstStyle/>
+          <a:p>
+            <a:pPr algn="ctr"/>
+            <a:r>
+              <a:rPr sz="1400" b="1">
+                <a:solidFill>
+                  <a:srgbClr val="FFFFFF"/>
+                </a:solidFill>
+              </a:rPr>
+              <a:t>삼성바이오로직스</a:t>
+            </a:r>
+          </a:p>
+        </p:txBody>
+      </p:sp>
+      <p:sp>
+        <p:nvSpPr>
+          <p:cNvPr id="44" name="TextBox 43"/>
+          <p:cNvSpPr txBox="1"/>
+          <p:nvPr/>
+        </p:nvSpPr>
+        <p:spPr>
+          <a:xfrm>
+            <a:off x="6309359" y="4315968"/>
+            <a:ext cx="2606040" cy="320040"/>
+          </a:xfrm>
+          <a:prstGeom prst="rect">
+            <a:avLst/>
+          </a:prstGeom>
+          <a:noFill/>
+        </p:spPr>
+        <p:txBody>
+          <a:bodyPr wrap="square">
+            <a:spAutoFit/>
+          </a:bodyPr>
+          <a:lstStyle/>
+          <a:p>
+            <a:pPr algn="l"/>
+            <a:r>
+              <a:rPr sz="1200" b="1">
+                <a:solidFill>
+                  <a:srgbClr val="1A7A4A"/>
+                </a:solidFill>
+              </a:rPr>
+              <a:t>207940</a:t>
+            </a:r>
+          </a:p>
+        </p:txBody>
+      </p:sp>
+      <p:sp>
+        <p:nvSpPr>
+          <p:cNvPr id="45" name="TextBox 44"/>
+          <p:cNvSpPr txBox="1"/>
+          <p:nvPr/>
+        </p:nvSpPr>
+        <p:spPr>
+          <a:xfrm>
+            <a:off x="6309359" y="4645152"/>
+            <a:ext cx="2606040" cy="320040"/>
+          </a:xfrm>
+          <a:prstGeom prst="rect">
+            <a:avLst/>
+          </a:prstGeom>
+          <a:noFill/>
+        </p:spPr>
+        <p:txBody>
+          <a:bodyPr wrap="square">
+            <a:spAutoFit/>
+          </a:bodyPr>
+          <a:lstStyle/>
+          <a:p>
+            <a:pPr algn="l"/>
+            <a:r>
+              <a:rPr sz="1100" b="0">
+                <a:solidFill>
+                  <a:srgbClr val="5A6A9E"/>
+                </a:solidFill>
+              </a:rPr>
+              <a:t>CMO · 바이오</a:t>
+            </a:r>
+          </a:p>
+        </p:txBody>
+      </p:sp>
+      <p:sp>
+        <p:nvSpPr>
+          <p:cNvPr id="46" name="TextBox 45"/>
+          <p:cNvSpPr txBox="1"/>
+          <p:nvPr/>
+        </p:nvSpPr>
+        <p:spPr>
+          <a:xfrm>
+            <a:off x="6309359" y="5074920"/>
+            <a:ext cx="2606040" cy="868680"/>
+          </a:xfrm>
+          <a:prstGeom prst="rect">
+            <a:avLst/>
+          </a:prstGeom>
+          <a:noFill/>
+        </p:spPr>
+        <p:txBody>
+          <a:bodyPr wrap="square">
+            <a:spAutoFit/>
+          </a:bodyPr>
+          <a:lstStyle/>
+          <a:p>
+            <a:pPr algn="l"/>
+            <a:r>
+              <a:rPr sz="1000" b="0">
+                <a:solidFill>
+                  <a:srgbClr val="1A2B55"/>
+                </a:solidFill>
+              </a:rPr>
+              <a:t>"장기 투자 괜찮을까?"</a:t>
+            </a:r>
+          </a:p>
+        </p:txBody>
+      </p:sp>
+      <p:sp>
+        <p:nvSpPr>
+          <p:cNvPr id="47" name="Rectangle 46"/>
+          <p:cNvSpPr/>
+          <p:nvPr/>
+        </p:nvSpPr>
+        <p:spPr>
+          <a:xfrm>
+            <a:off x="9189720" y="3840480"/>
+            <a:ext cx="2788920" cy="2331720"/>
+          </a:xfrm>
+          <a:prstGeom prst="rect">
+            <a:avLst/>
+          </a:prstGeom>
+          <a:solidFill>
+            <a:srgbClr val="EEF2FF"/>
+          </a:solidFill>
+          <a:ln>
+            <a:noFill/>
+          </a:ln>
+        </p:spPr>
+        <p:style>
+          <a:lnRef idx="1">
+            <a:schemeClr val="accent1"/>
+          </a:lnRef>
+          <a:fillRef idx="3">
+            <a:schemeClr val="accent1"/>
+          </a:fillRef>
+          <a:effectRef idx="2">
+            <a:schemeClr val="accent1"/>
+          </a:effectRef>
+          <a:fontRef idx="minor">
+            <a:schemeClr val="lt1"/>
+          </a:fontRef>
+        </p:style>
+        <p:txBody>
+          <a:bodyPr rtlCol="0" anchor="ctr"/>
+          <a:lstStyle/>
+          <a:p>
+            <a:pPr algn="ctr"/>
+          </a:p>
+        </p:txBody>
+      </p:sp>
+      <p:sp>
+        <p:nvSpPr>
+          <p:cNvPr id="48" name="Rectangle 47"/>
+          <p:cNvSpPr/>
           <p:nvPr/>
         </p:nvSpPr>
         <p:spPr>
@@ -9335,19 +11026,62 @@
           <a:prstGeom prst="rect">
             <a:avLst/>
           </a:prstGeom>
-          <a:noFill/>
-        </p:spPr>
-        <p:txBody>
-          <a:bodyPr wrap="square">
-            <a:spAutoFit/>
-          </a:bodyPr>
+          <a:solidFill>
+            <a:srgbClr val="3A59D1"/>
+          </a:solidFill>
+          <a:ln>
+            <a:noFill/>
+          </a:ln>
+        </p:spPr>
+        <p:style>
+          <a:lnRef idx="1">
+            <a:schemeClr val="accent1"/>
+          </a:lnRef>
+          <a:fillRef idx="3">
+            <a:schemeClr val="accent1"/>
+          </a:fillRef>
+          <a:effectRef idx="2">
+            <a:schemeClr val="accent1"/>
+          </a:effectRef>
+          <a:fontRef idx="minor">
+            <a:schemeClr val="lt1"/>
+          </a:fontRef>
+        </p:style>
+        <p:txBody>
+          <a:bodyPr rtlCol="0" anchor="ctr"/>
           <a:lstStyle/>
           <a:p>
             <a:pPr algn="ctr"/>
+          </a:p>
+        </p:txBody>
+      </p:sp>
+      <p:sp>
+        <p:nvSpPr>
+          <p:cNvPr id="49" name="TextBox 48"/>
+          <p:cNvSpPr txBox="1"/>
+          <p:nvPr/>
+        </p:nvSpPr>
+        <p:spPr>
+          <a:xfrm>
+            <a:off x="9189720" y="3840480"/>
+            <a:ext cx="2788920" cy="384048"/>
+          </a:xfrm>
+          <a:prstGeom prst="rect">
+            <a:avLst/>
+          </a:prstGeom>
+          <a:noFill/>
+        </p:spPr>
+        <p:txBody>
+          <a:bodyPr wrap="square">
+            <a:spAutoFit/>
+          </a:bodyPr>
+          <a:lstStyle/>
+          <a:p>
+            <a:pPr algn="ctr"/>
             <a:r>
               <a:rPr sz="1400" b="1">
                 <a:solidFill>
-                  <a:srgbClr val="1E1E2E"/>
+                  <a:srgbClr val="FFFFFF"/>
                 </a:solidFill>
               </a:rPr>
               <a:t>포스코</a:t>
@@ -9381,7 +11115,7 @@
             <a:r>
               <a:rPr sz="1200" b="1">
                 <a:solidFill>
-                  <a:srgbClr val="89B4FA"/>
+                  <a:srgbClr val="3A59D1"/>
                 </a:solidFill>
               </a:rPr>
               <a:t>005490</a:t>
@@ -9415,7 +11149,7 @@
             <a:r>
               <a:rPr sz="1100" b="0">
                 <a:solidFill>
-                  <a:srgbClr val="BAC2DE"/>
+                  <a:srgbClr val="5A6A9E"/>
                 </a:solidFill>
               </a:rPr>
               <a:t>2차전지 · 철강</a:t>
@@ -9449,7 +11183,7 @@
             <a:r>
               <a:rPr sz="1000" b="0">
                 <a:solidFill>
-                  <a:srgbClr val="FFFFFF"/>
+                  <a:srgbClr val="1A2B55"/>
                 </a:solidFill>
               </a:rPr>
               <a:t>"2차전지 소재 사업 어때?"</a:t>
@@ -9483,7 +11217,7 @@
             <a:r>
               <a:rPr sz="1100" b="0">
                 <a:solidFill>
-                  <a:srgbClr val="BAC2DE"/>
+                  <a:srgbClr val="5A6A9E"/>
                 </a:solidFill>
               </a:rPr>
               <a:t>※ 새 종목 추가: TICKER_TO_KEYWORDS &amp; COLLECTION_KEYWORDS 두 곳 모두 수정</a:t>
